--- a/skills/positioning-map-pptx/assets/roleup/positioning-map-template.pptx
+++ b/skills/positioning-map-pptx/assets/roleup/positioning-map-template.pptx
@@ -1,17 +1,17 @@
 
 <file path=ppt/presentation.xml><?xml version="1.0" encoding="utf-8"?>
-<p:presentation xmlns:a="http://schemas.openxmlformats.org/drawingml/2006/main" xmlns:ns3="http://schemas.microsoft.com/office/powerpoint/2012/main" xmlns:p="http://schemas.openxmlformats.org/presentationml/2006/main" xmlns:r="http://schemas.openxmlformats.org/officeDocument/2006/relationships">
+<p:presentation xmlns:a="http://schemas.openxmlformats.org/drawingml/2006/main" xmlns:r="http://schemas.openxmlformats.org/officeDocument/2006/relationships" xmlns:p="http://schemas.openxmlformats.org/presentationml/2006/main">
   <p:sldMasterIdLst>
     <p:sldMasterId id="2147483648" r:id="rId4"/>
   </p:sldMasterIdLst>
   <p:notesMasterIdLst>
-    <p:notesMasterId r:id="rId20"/>
+    <p:notesMasterId r:id="rId6"/>
   </p:notesMasterIdLst>
   <p:handoutMasterIdLst>
-    <p:handoutMasterId r:id="rId21"/>
+    <p:handoutMasterId r:id="rId7"/>
   </p:handoutMasterIdLst>
   <p:sldIdLst>
-    <p:sldId id="3099" r:id="rId8"/>
+    <p:sldId id="3099" r:id="rId5"/>
   </p:sldIdLst>
   <p:sldSz cx="10691813" cy="7559675"/>
   <p:notesSz cx="9926638" cy="6797675"/>
@@ -22,33 +22,33 @@
   </p:defaultTextStyle>
   <p:extLst>
     <p:ext uri="{EFAFB233-063F-42B5-8137-9DF3F51BA10A}">
-      <ns3:sldGuideLst>
-        <ns3:guide id="1" pos="3368" userDrawn="1">
-          <ns3:clr>
+      <p15:sldGuideLst xmlns:p15="http://schemas.microsoft.com/office/powerpoint/2012/main">
+        <p15:guide id="1" pos="3368" userDrawn="1">
+          <p15:clr>
             <a:srgbClr val="A4A3A4"/>
-          </ns3:clr>
-        </ns3:guide>
-        <ns3:guide id="2" pos="3489" userDrawn="1">
-          <ns3:clr>
+          </p15:clr>
+        </p15:guide>
+        <p15:guide id="2" pos="3489" userDrawn="1">
+          <p15:clr>
             <a:srgbClr val="A4A3A4"/>
-          </ns3:clr>
-        </ns3:guide>
-        <ns3:guide id="3" orient="horz" pos="2381" userDrawn="1">
-          <ns3:clr>
+          </p15:clr>
+        </p15:guide>
+        <p15:guide id="3" orient="horz" pos="2381" userDrawn="1">
+          <p15:clr>
             <a:srgbClr val="A4A3A4"/>
-          </ns3:clr>
-        </ns3:guide>
-        <ns3:guide id="5" pos="3246" userDrawn="1">
-          <ns3:clr>
+          </p15:clr>
+        </p15:guide>
+        <p15:guide id="5" pos="3246" userDrawn="1">
+          <p15:clr>
             <a:srgbClr val="A4A3A4"/>
-          </ns3:clr>
-        </ns3:guide>
-        <ns3:guide id="7" orient="horz" pos="2608" userDrawn="1">
-          <ns3:clr>
+          </p15:clr>
+        </p15:guide>
+        <p15:guide id="7" orient="horz" pos="2608" userDrawn="1">
+          <p15:clr>
             <a:srgbClr val="A4A3A4"/>
-          </ns3:clr>
-        </ns3:guide>
-      </ns3:sldGuideLst>
+          </p15:clr>
+        </p15:guide>
+      </p15:sldGuideLst>
     </p:ext>
   </p:extLst>
 </p:presentation>
@@ -225,7 +225,7 @@
           <a:p>
             <a:fld id="{16913773-77E7-48AA-A8C2-372A51CA6EC8}" type="datetimeFigureOut">
               <a:rPr kumimoji="1" lang="ja-JP" altLang="en-US" smtClean="0"/>
-              <a:t>2026/5/1</a:t>
+              <a:t>2026/6/7</a:t>
             </a:fld>
             <a:endParaRPr kumimoji="1" lang="ja-JP" altLang="en-US"/>
           </a:p>
@@ -418,7 +418,7 @@
           <a:p>
             <a:fld id="{A07AF5CB-A42C-47EC-982F-D48632E37F99}" type="datetimeFigureOut">
               <a:rPr kumimoji="1" lang="ja-JP" altLang="en-US" smtClean="0"/>
-              <a:t>2026/5/1</a:t>
+              <a:t>2026/6/7</a:t>
             </a:fld>
             <a:endParaRPr kumimoji="1" lang="ja-JP" altLang="en-US"/>
           </a:p>
@@ -722,927 +722,6 @@
   <p:cSld>
     <p:spTree>
       <p:nvGrpSpPr>
-        <p:cNvPr id="1" name=""/>
-        <p:cNvGrpSpPr/>
-        <p:nvPr/>
-      </p:nvGrpSpPr>
-      <p:grpSpPr>
-        <a:xfrm>
-          <a:off x="0" y="0"/>
-          <a:ext cx="0" cy="0"/>
-          <a:chOff x="0" y="0"/>
-          <a:chExt cx="0" cy="0"/>
-        </a:xfrm>
-      </p:grpSpPr>
-      <p:sp>
-        <p:nvSpPr>
-          <p:cNvPr id="2" name="スライド イメージ プレースホルダー 1"/>
-          <p:cNvSpPr>
-            <a:spLocks noGrp="1" noRot="1" noChangeAspect="1"/>
-          </p:cNvSpPr>
-          <p:nvPr>
-            <p:ph type="sldImg"/>
-          </p:nvPr>
-        </p:nvSpPr>
-        <p:spPr>
-          <a:xfrm>
-            <a:off x="3343275" y="850900"/>
-            <a:ext cx="3240088" cy="2292350"/>
-          </a:xfrm>
-        </p:spPr>
-      </p:sp>
-      <p:sp>
-        <p:nvSpPr>
-          <p:cNvPr id="3" name="ノート プレースホルダー 2"/>
-          <p:cNvSpPr>
-            <a:spLocks noGrp="1"/>
-          </p:cNvSpPr>
-          <p:nvPr>
-            <p:ph type="body" idx="1"/>
-          </p:nvPr>
-        </p:nvSpPr>
-        <p:spPr/>
-        <p:txBody>
-          <a:bodyPr/>
-          <a:lstStyle/>
-          <a:p>
-            <a:endParaRPr kumimoji="1" lang="ja-JP" altLang="en-US"/>
-          </a:p>
-        </p:txBody>
-      </p:sp>
-      <p:sp>
-        <p:nvSpPr>
-          <p:cNvPr id="4" name="スライド番号プレースホルダー 3"/>
-          <p:cNvSpPr>
-            <a:spLocks noGrp="1"/>
-          </p:cNvSpPr>
-          <p:nvPr>
-            <p:ph type="sldNum" sz="quarter" idx="5"/>
-          </p:nvPr>
-        </p:nvSpPr>
-        <p:spPr/>
-        <p:txBody>
-          <a:bodyPr/>
-          <a:lstStyle/>
-          <a:p>
-            <a:fld id="{AF6D15DF-6062-465E-BCC6-9356F01AD1D3}" type="slidenum">
-              <a:rPr kumimoji="1" lang="ja-JP" altLang="en-US" smtClean="0"/>
-              <a:t>1</a:t>
-            </a:fld>
-            <a:endParaRPr kumimoji="1" lang="ja-JP" altLang="en-US"/>
-          </a:p>
-        </p:txBody>
-      </p:sp>
-    </p:spTree>
-    <p:extLst>
-      <p:ext uri="{BB962C8B-B14F-4D97-AF65-F5344CB8AC3E}">
-        <p14:creationId xmlns:p14="http://schemas.microsoft.com/office/powerpoint/2010/main" val="2030481094"/>
-      </p:ext>
-    </p:extLst>
-  </p:cSld>
-  <p:clrMapOvr>
-    <a:masterClrMapping/>
-  </p:clrMapOvr>
-</p:notes>
-</file>
-
-<file path=ppt/notesSlides/notesSlide10.xml><?xml version="1.0" encoding="utf-8"?>
-<p:notes xmlns:a="http://schemas.openxmlformats.org/drawingml/2006/main" xmlns:r="http://schemas.openxmlformats.org/officeDocument/2006/relationships" xmlns:p="http://schemas.openxmlformats.org/presentationml/2006/main">
-  <p:cSld>
-    <p:spTree>
-      <p:nvGrpSpPr>
-        <p:cNvPr id="1" name="">
-          <a:extLst>
-            <a:ext uri="{FF2B5EF4-FFF2-40B4-BE49-F238E27FC236}">
-              <a16:creationId xmlns:a16="http://schemas.microsoft.com/office/drawing/2014/main" id="{9F52536B-407F-DEC9-FB74-9995A0B4D9D3}"/>
-            </a:ext>
-          </a:extLst>
-        </p:cNvPr>
-        <p:cNvGrpSpPr/>
-        <p:nvPr/>
-      </p:nvGrpSpPr>
-      <p:grpSpPr>
-        <a:xfrm>
-          <a:off x="0" y="0"/>
-          <a:ext cx="0" cy="0"/>
-          <a:chOff x="0" y="0"/>
-          <a:chExt cx="0" cy="0"/>
-        </a:xfrm>
-      </p:grpSpPr>
-      <p:sp>
-        <p:nvSpPr>
-          <p:cNvPr id="2" name="スライド イメージ プレースホルダー 1">
-            <a:extLst>
-              <a:ext uri="{FF2B5EF4-FFF2-40B4-BE49-F238E27FC236}">
-                <a16:creationId xmlns:a16="http://schemas.microsoft.com/office/drawing/2014/main" id="{776838B8-B464-2D07-F28B-D6302D207398}"/>
-              </a:ext>
-            </a:extLst>
-          </p:cNvPr>
-          <p:cNvSpPr>
-            <a:spLocks noGrp="1" noRot="1" noChangeAspect="1"/>
-          </p:cNvSpPr>
-          <p:nvPr>
-            <p:ph type="sldImg"/>
-          </p:nvPr>
-        </p:nvSpPr>
-        <p:spPr>
-          <a:xfrm>
-            <a:off x="3343275" y="850900"/>
-            <a:ext cx="3240088" cy="2292350"/>
-          </a:xfrm>
-        </p:spPr>
-      </p:sp>
-      <p:sp>
-        <p:nvSpPr>
-          <p:cNvPr id="3" name="ノート プレースホルダー 2">
-            <a:extLst>
-              <a:ext uri="{FF2B5EF4-FFF2-40B4-BE49-F238E27FC236}">
-                <a16:creationId xmlns:a16="http://schemas.microsoft.com/office/drawing/2014/main" id="{DDF87BBA-7C47-2123-B11B-6E60DCA762A5}"/>
-              </a:ext>
-            </a:extLst>
-          </p:cNvPr>
-          <p:cNvSpPr>
-            <a:spLocks noGrp="1"/>
-          </p:cNvSpPr>
-          <p:nvPr>
-            <p:ph type="body" idx="1"/>
-          </p:nvPr>
-        </p:nvSpPr>
-        <p:spPr/>
-        <p:txBody>
-          <a:bodyPr/>
-          <a:lstStyle/>
-          <a:p>
-            <a:endParaRPr kumimoji="1" lang="ja-JP" altLang="en-US"/>
-          </a:p>
-        </p:txBody>
-      </p:sp>
-      <p:sp>
-        <p:nvSpPr>
-          <p:cNvPr id="4" name="スライド番号プレースホルダー 3">
-            <a:extLst>
-              <a:ext uri="{FF2B5EF4-FFF2-40B4-BE49-F238E27FC236}">
-                <a16:creationId xmlns:a16="http://schemas.microsoft.com/office/drawing/2014/main" id="{421BF660-EFC2-ED07-AA17-A2F23AED7479}"/>
-              </a:ext>
-            </a:extLst>
-          </p:cNvPr>
-          <p:cNvSpPr>
-            <a:spLocks noGrp="1"/>
-          </p:cNvSpPr>
-          <p:nvPr>
-            <p:ph type="sldNum" sz="quarter" idx="5"/>
-          </p:nvPr>
-        </p:nvSpPr>
-        <p:spPr/>
-        <p:txBody>
-          <a:bodyPr/>
-          <a:lstStyle/>
-          <a:p>
-            <a:fld id="{AF6D15DF-6062-465E-BCC6-9356F01AD1D3}" type="slidenum">
-              <a:rPr kumimoji="1" lang="ja-JP" altLang="en-US" smtClean="0"/>
-              <a:t>10</a:t>
-            </a:fld>
-            <a:endParaRPr kumimoji="1" lang="ja-JP" altLang="en-US"/>
-          </a:p>
-        </p:txBody>
-      </p:sp>
-    </p:spTree>
-    <p:extLst>
-      <p:ext uri="{BB962C8B-B14F-4D97-AF65-F5344CB8AC3E}">
-        <p14:creationId xmlns:p14="http://schemas.microsoft.com/office/powerpoint/2010/main" val="536066735"/>
-      </p:ext>
-    </p:extLst>
-  </p:cSld>
-  <p:clrMapOvr>
-    <a:masterClrMapping/>
-  </p:clrMapOvr>
-</p:notes>
-</file>
-
-<file path=ppt/notesSlides/notesSlide11.xml><?xml version="1.0" encoding="utf-8"?>
-<p:notes xmlns:a="http://schemas.openxmlformats.org/drawingml/2006/main" xmlns:r="http://schemas.openxmlformats.org/officeDocument/2006/relationships" xmlns:p="http://schemas.openxmlformats.org/presentationml/2006/main">
-  <p:cSld>
-    <p:spTree>
-      <p:nvGrpSpPr>
-        <p:cNvPr id="1" name="">
-          <a:extLst>
-            <a:ext uri="{FF2B5EF4-FFF2-40B4-BE49-F238E27FC236}">
-              <a16:creationId xmlns:a16="http://schemas.microsoft.com/office/drawing/2014/main" id="{65C2C22C-7F32-4559-D2E8-4B0FF16CD378}"/>
-            </a:ext>
-          </a:extLst>
-        </p:cNvPr>
-        <p:cNvGrpSpPr/>
-        <p:nvPr/>
-      </p:nvGrpSpPr>
-      <p:grpSpPr>
-        <a:xfrm>
-          <a:off x="0" y="0"/>
-          <a:ext cx="0" cy="0"/>
-          <a:chOff x="0" y="0"/>
-          <a:chExt cx="0" cy="0"/>
-        </a:xfrm>
-      </p:grpSpPr>
-      <p:sp>
-        <p:nvSpPr>
-          <p:cNvPr id="2" name="スライド イメージ プレースホルダー 1">
-            <a:extLst>
-              <a:ext uri="{FF2B5EF4-FFF2-40B4-BE49-F238E27FC236}">
-                <a16:creationId xmlns:a16="http://schemas.microsoft.com/office/drawing/2014/main" id="{F19DC03A-8477-210D-2B8B-E38B994F8C53}"/>
-              </a:ext>
-            </a:extLst>
-          </p:cNvPr>
-          <p:cNvSpPr>
-            <a:spLocks noGrp="1" noRot="1" noChangeAspect="1"/>
-          </p:cNvSpPr>
-          <p:nvPr>
-            <p:ph type="sldImg"/>
-          </p:nvPr>
-        </p:nvSpPr>
-        <p:spPr>
-          <a:xfrm>
-            <a:off x="3343275" y="850900"/>
-            <a:ext cx="3240088" cy="2292350"/>
-          </a:xfrm>
-        </p:spPr>
-      </p:sp>
-      <p:sp>
-        <p:nvSpPr>
-          <p:cNvPr id="3" name="ノート プレースホルダー 2">
-            <a:extLst>
-              <a:ext uri="{FF2B5EF4-FFF2-40B4-BE49-F238E27FC236}">
-                <a16:creationId xmlns:a16="http://schemas.microsoft.com/office/drawing/2014/main" id="{51679E5C-4E44-7017-243D-998F5C35975B}"/>
-              </a:ext>
-            </a:extLst>
-          </p:cNvPr>
-          <p:cNvSpPr>
-            <a:spLocks noGrp="1"/>
-          </p:cNvSpPr>
-          <p:nvPr>
-            <p:ph type="body" idx="1"/>
-          </p:nvPr>
-        </p:nvSpPr>
-        <p:spPr/>
-        <p:txBody>
-          <a:bodyPr/>
-          <a:lstStyle/>
-          <a:p>
-            <a:endParaRPr kumimoji="1" lang="ja-JP" altLang="en-US"/>
-          </a:p>
-        </p:txBody>
-      </p:sp>
-      <p:sp>
-        <p:nvSpPr>
-          <p:cNvPr id="4" name="スライド番号プレースホルダー 3">
-            <a:extLst>
-              <a:ext uri="{FF2B5EF4-FFF2-40B4-BE49-F238E27FC236}">
-                <a16:creationId xmlns:a16="http://schemas.microsoft.com/office/drawing/2014/main" id="{1C1DF7F7-09EA-F33F-380F-5CFD48AC4C53}"/>
-              </a:ext>
-            </a:extLst>
-          </p:cNvPr>
-          <p:cNvSpPr>
-            <a:spLocks noGrp="1"/>
-          </p:cNvSpPr>
-          <p:nvPr>
-            <p:ph type="sldNum" sz="quarter" idx="5"/>
-          </p:nvPr>
-        </p:nvSpPr>
-        <p:spPr/>
-        <p:txBody>
-          <a:bodyPr/>
-          <a:lstStyle/>
-          <a:p>
-            <a:fld id="{AF6D15DF-6062-465E-BCC6-9356F01AD1D3}" type="slidenum">
-              <a:rPr kumimoji="1" lang="ja-JP" altLang="en-US" smtClean="0"/>
-              <a:t>11</a:t>
-            </a:fld>
-            <a:endParaRPr kumimoji="1" lang="ja-JP" altLang="en-US"/>
-          </a:p>
-        </p:txBody>
-      </p:sp>
-    </p:spTree>
-    <p:extLst>
-      <p:ext uri="{BB962C8B-B14F-4D97-AF65-F5344CB8AC3E}">
-        <p14:creationId xmlns:p14="http://schemas.microsoft.com/office/powerpoint/2010/main" val="316361172"/>
-      </p:ext>
-    </p:extLst>
-  </p:cSld>
-  <p:clrMapOvr>
-    <a:masterClrMapping/>
-  </p:clrMapOvr>
-</p:notes>
-</file>
-
-<file path=ppt/notesSlides/notesSlide12.xml><?xml version="1.0" encoding="utf-8"?>
-<p:notes xmlns:a="http://schemas.openxmlformats.org/drawingml/2006/main" xmlns:r="http://schemas.openxmlformats.org/officeDocument/2006/relationships" xmlns:p="http://schemas.openxmlformats.org/presentationml/2006/main">
-  <p:cSld>
-    <p:spTree>
-      <p:nvGrpSpPr>
-        <p:cNvPr id="1" name="">
-          <a:extLst>
-            <a:ext uri="{FF2B5EF4-FFF2-40B4-BE49-F238E27FC236}">
-              <a16:creationId xmlns:a16="http://schemas.microsoft.com/office/drawing/2014/main" id="{E65AB75C-5030-7A4C-2BF7-C3BE333DE9C1}"/>
-            </a:ext>
-          </a:extLst>
-        </p:cNvPr>
-        <p:cNvGrpSpPr/>
-        <p:nvPr/>
-      </p:nvGrpSpPr>
-      <p:grpSpPr>
-        <a:xfrm>
-          <a:off x="0" y="0"/>
-          <a:ext cx="0" cy="0"/>
-          <a:chOff x="0" y="0"/>
-          <a:chExt cx="0" cy="0"/>
-        </a:xfrm>
-      </p:grpSpPr>
-      <p:sp>
-        <p:nvSpPr>
-          <p:cNvPr id="2" name="スライド イメージ プレースホルダー 1">
-            <a:extLst>
-              <a:ext uri="{FF2B5EF4-FFF2-40B4-BE49-F238E27FC236}">
-                <a16:creationId xmlns:a16="http://schemas.microsoft.com/office/drawing/2014/main" id="{EED2F3B1-551C-54C4-BD68-C5B49213EEE6}"/>
-              </a:ext>
-            </a:extLst>
-          </p:cNvPr>
-          <p:cNvSpPr>
-            <a:spLocks noGrp="1" noRot="1" noChangeAspect="1"/>
-          </p:cNvSpPr>
-          <p:nvPr>
-            <p:ph type="sldImg"/>
-          </p:nvPr>
-        </p:nvSpPr>
-        <p:spPr>
-          <a:xfrm>
-            <a:off x="3343275" y="850900"/>
-            <a:ext cx="3240088" cy="2292350"/>
-          </a:xfrm>
-        </p:spPr>
-      </p:sp>
-      <p:sp>
-        <p:nvSpPr>
-          <p:cNvPr id="3" name="ノート プレースホルダー 2">
-            <a:extLst>
-              <a:ext uri="{FF2B5EF4-FFF2-40B4-BE49-F238E27FC236}">
-                <a16:creationId xmlns:a16="http://schemas.microsoft.com/office/drawing/2014/main" id="{F6CE13EC-E54B-44E2-3007-692ADE4C8ED4}"/>
-              </a:ext>
-            </a:extLst>
-          </p:cNvPr>
-          <p:cNvSpPr>
-            <a:spLocks noGrp="1"/>
-          </p:cNvSpPr>
-          <p:nvPr>
-            <p:ph type="body" idx="1"/>
-          </p:nvPr>
-        </p:nvSpPr>
-        <p:spPr/>
-        <p:txBody>
-          <a:bodyPr/>
-          <a:lstStyle/>
-          <a:p>
-            <a:endParaRPr kumimoji="1" lang="ja-JP" altLang="en-US"/>
-          </a:p>
-        </p:txBody>
-      </p:sp>
-      <p:sp>
-        <p:nvSpPr>
-          <p:cNvPr id="4" name="スライド番号プレースホルダー 3">
-            <a:extLst>
-              <a:ext uri="{FF2B5EF4-FFF2-40B4-BE49-F238E27FC236}">
-                <a16:creationId xmlns:a16="http://schemas.microsoft.com/office/drawing/2014/main" id="{90D25D24-A317-084B-7BA7-908BA14A6D59}"/>
-              </a:ext>
-            </a:extLst>
-          </p:cNvPr>
-          <p:cNvSpPr>
-            <a:spLocks noGrp="1"/>
-          </p:cNvSpPr>
-          <p:nvPr>
-            <p:ph type="sldNum" sz="quarter" idx="5"/>
-          </p:nvPr>
-        </p:nvSpPr>
-        <p:spPr/>
-        <p:txBody>
-          <a:bodyPr/>
-          <a:lstStyle/>
-          <a:p>
-            <a:fld id="{AF6D15DF-6062-465E-BCC6-9356F01AD1D3}" type="slidenum">
-              <a:rPr kumimoji="1" lang="ja-JP" altLang="en-US" smtClean="0"/>
-              <a:t>12</a:t>
-            </a:fld>
-            <a:endParaRPr kumimoji="1" lang="ja-JP" altLang="en-US"/>
-          </a:p>
-        </p:txBody>
-      </p:sp>
-    </p:spTree>
-    <p:extLst>
-      <p:ext uri="{BB962C8B-B14F-4D97-AF65-F5344CB8AC3E}">
-        <p14:creationId xmlns:p14="http://schemas.microsoft.com/office/powerpoint/2010/main" val="2845304197"/>
-      </p:ext>
-    </p:extLst>
-  </p:cSld>
-  <p:clrMapOvr>
-    <a:masterClrMapping/>
-  </p:clrMapOvr>
-</p:notes>
-</file>
-
-<file path=ppt/notesSlides/notesSlide13.xml><?xml version="1.0" encoding="utf-8"?>
-<p:notes xmlns:a="http://schemas.openxmlformats.org/drawingml/2006/main" xmlns:r="http://schemas.openxmlformats.org/officeDocument/2006/relationships" xmlns:p="http://schemas.openxmlformats.org/presentationml/2006/main">
-  <p:cSld>
-    <p:spTree>
-      <p:nvGrpSpPr>
-        <p:cNvPr id="1" name="">
-          <a:extLst>
-            <a:ext uri="{FF2B5EF4-FFF2-40B4-BE49-F238E27FC236}">
-              <a16:creationId xmlns:a16="http://schemas.microsoft.com/office/drawing/2014/main" id="{B4A65EFF-D379-9580-AC1C-AB5CBACE553C}"/>
-            </a:ext>
-          </a:extLst>
-        </p:cNvPr>
-        <p:cNvGrpSpPr/>
-        <p:nvPr/>
-      </p:nvGrpSpPr>
-      <p:grpSpPr>
-        <a:xfrm>
-          <a:off x="0" y="0"/>
-          <a:ext cx="0" cy="0"/>
-          <a:chOff x="0" y="0"/>
-          <a:chExt cx="0" cy="0"/>
-        </a:xfrm>
-      </p:grpSpPr>
-      <p:sp>
-        <p:nvSpPr>
-          <p:cNvPr id="2" name="スライド イメージ プレースホルダー 1">
-            <a:extLst>
-              <a:ext uri="{FF2B5EF4-FFF2-40B4-BE49-F238E27FC236}">
-                <a16:creationId xmlns:a16="http://schemas.microsoft.com/office/drawing/2014/main" id="{9A732234-DA7F-2D40-FFAC-C45B2D23C443}"/>
-              </a:ext>
-            </a:extLst>
-          </p:cNvPr>
-          <p:cNvSpPr>
-            <a:spLocks noGrp="1" noRot="1" noChangeAspect="1"/>
-          </p:cNvSpPr>
-          <p:nvPr>
-            <p:ph type="sldImg"/>
-          </p:nvPr>
-        </p:nvSpPr>
-        <p:spPr>
-          <a:xfrm>
-            <a:off x="3343275" y="850900"/>
-            <a:ext cx="3240088" cy="2292350"/>
-          </a:xfrm>
-        </p:spPr>
-      </p:sp>
-      <p:sp>
-        <p:nvSpPr>
-          <p:cNvPr id="3" name="ノート プレースホルダー 2">
-            <a:extLst>
-              <a:ext uri="{FF2B5EF4-FFF2-40B4-BE49-F238E27FC236}">
-                <a16:creationId xmlns:a16="http://schemas.microsoft.com/office/drawing/2014/main" id="{E2A7AD62-04D2-6646-37C3-04632ED8BA7C}"/>
-              </a:ext>
-            </a:extLst>
-          </p:cNvPr>
-          <p:cNvSpPr>
-            <a:spLocks noGrp="1"/>
-          </p:cNvSpPr>
-          <p:nvPr>
-            <p:ph type="body" idx="1"/>
-          </p:nvPr>
-        </p:nvSpPr>
-        <p:spPr/>
-        <p:txBody>
-          <a:bodyPr/>
-          <a:lstStyle/>
-          <a:p>
-            <a:endParaRPr kumimoji="1" lang="ja-JP" altLang="en-US"/>
-          </a:p>
-        </p:txBody>
-      </p:sp>
-      <p:sp>
-        <p:nvSpPr>
-          <p:cNvPr id="4" name="スライド番号プレースホルダー 3">
-            <a:extLst>
-              <a:ext uri="{FF2B5EF4-FFF2-40B4-BE49-F238E27FC236}">
-                <a16:creationId xmlns:a16="http://schemas.microsoft.com/office/drawing/2014/main" id="{F9A61AF0-C94A-3222-AEA9-1F22FDC9127C}"/>
-              </a:ext>
-            </a:extLst>
-          </p:cNvPr>
-          <p:cNvSpPr>
-            <a:spLocks noGrp="1"/>
-          </p:cNvSpPr>
-          <p:nvPr>
-            <p:ph type="sldNum" sz="quarter" idx="5"/>
-          </p:nvPr>
-        </p:nvSpPr>
-        <p:spPr/>
-        <p:txBody>
-          <a:bodyPr/>
-          <a:lstStyle/>
-          <a:p>
-            <a:fld id="{AF6D15DF-6062-465E-BCC6-9356F01AD1D3}" type="slidenum">
-              <a:rPr kumimoji="1" lang="ja-JP" altLang="en-US" smtClean="0"/>
-              <a:t>13</a:t>
-            </a:fld>
-            <a:endParaRPr kumimoji="1" lang="ja-JP" altLang="en-US"/>
-          </a:p>
-        </p:txBody>
-      </p:sp>
-    </p:spTree>
-    <p:extLst>
-      <p:ext uri="{BB962C8B-B14F-4D97-AF65-F5344CB8AC3E}">
-        <p14:creationId xmlns:p14="http://schemas.microsoft.com/office/powerpoint/2010/main" val="829301122"/>
-      </p:ext>
-    </p:extLst>
-  </p:cSld>
-  <p:clrMapOvr>
-    <a:masterClrMapping/>
-  </p:clrMapOvr>
-</p:notes>
-</file>
-
-<file path=ppt/notesSlides/notesSlide14.xml><?xml version="1.0" encoding="utf-8"?>
-<p:notes xmlns:a="http://schemas.openxmlformats.org/drawingml/2006/main" xmlns:r="http://schemas.openxmlformats.org/officeDocument/2006/relationships" xmlns:p="http://schemas.openxmlformats.org/presentationml/2006/main">
-  <p:cSld>
-    <p:spTree>
-      <p:nvGrpSpPr>
-        <p:cNvPr id="1" name=""/>
-        <p:cNvGrpSpPr/>
-        <p:nvPr/>
-      </p:nvGrpSpPr>
-      <p:grpSpPr>
-        <a:xfrm>
-          <a:off x="0" y="0"/>
-          <a:ext cx="0" cy="0"/>
-          <a:chOff x="0" y="0"/>
-          <a:chExt cx="0" cy="0"/>
-        </a:xfrm>
-      </p:grpSpPr>
-      <p:sp>
-        <p:nvSpPr>
-          <p:cNvPr id="2" name="スライド イメージ プレースホルダー 1"/>
-          <p:cNvSpPr>
-            <a:spLocks noGrp="1" noRot="1" noChangeAspect="1"/>
-          </p:cNvSpPr>
-          <p:nvPr>
-            <p:ph type="sldImg"/>
-          </p:nvPr>
-        </p:nvSpPr>
-        <p:spPr>
-          <a:xfrm>
-            <a:off x="3343275" y="850900"/>
-            <a:ext cx="3240088" cy="2292350"/>
-          </a:xfrm>
-        </p:spPr>
-      </p:sp>
-      <p:sp>
-        <p:nvSpPr>
-          <p:cNvPr id="3" name="ノート プレースホルダー 2"/>
-          <p:cNvSpPr>
-            <a:spLocks noGrp="1"/>
-          </p:cNvSpPr>
-          <p:nvPr>
-            <p:ph type="body" idx="1"/>
-          </p:nvPr>
-        </p:nvSpPr>
-        <p:spPr/>
-        <p:txBody>
-          <a:bodyPr/>
-          <a:lstStyle/>
-          <a:p>
-            <a:endParaRPr kumimoji="1" lang="ja-JP" altLang="en-US"/>
-          </a:p>
-        </p:txBody>
-      </p:sp>
-      <p:sp>
-        <p:nvSpPr>
-          <p:cNvPr id="4" name="スライド番号プレースホルダー 3"/>
-          <p:cNvSpPr>
-            <a:spLocks noGrp="1"/>
-          </p:cNvSpPr>
-          <p:nvPr>
-            <p:ph type="sldNum" sz="quarter" idx="5"/>
-          </p:nvPr>
-        </p:nvSpPr>
-        <p:spPr/>
-        <p:txBody>
-          <a:bodyPr/>
-          <a:lstStyle/>
-          <a:p>
-            <a:fld id="{AF6D15DF-6062-465E-BCC6-9356F01AD1D3}" type="slidenum">
-              <a:rPr kumimoji="1" lang="ja-JP" altLang="en-US" smtClean="0"/>
-              <a:t>14</a:t>
-            </a:fld>
-            <a:endParaRPr kumimoji="1" lang="ja-JP" altLang="en-US"/>
-          </a:p>
-        </p:txBody>
-      </p:sp>
-    </p:spTree>
-    <p:extLst>
-      <p:ext uri="{BB962C8B-B14F-4D97-AF65-F5344CB8AC3E}">
-        <p14:creationId xmlns:p14="http://schemas.microsoft.com/office/powerpoint/2010/main" val="2439397750"/>
-      </p:ext>
-    </p:extLst>
-  </p:cSld>
-  <p:clrMapOvr>
-    <a:masterClrMapping/>
-  </p:clrMapOvr>
-</p:notes>
-</file>
-
-<file path=ppt/notesSlides/notesSlide15.xml><?xml version="1.0" encoding="utf-8"?>
-<p:notes xmlns:a="http://schemas.openxmlformats.org/drawingml/2006/main" xmlns:r="http://schemas.openxmlformats.org/officeDocument/2006/relationships" xmlns:p="http://schemas.openxmlformats.org/presentationml/2006/main">
-  <p:cSld>
-    <p:spTree>
-      <p:nvGrpSpPr>
-        <p:cNvPr id="1" name=""/>
-        <p:cNvGrpSpPr/>
-        <p:nvPr/>
-      </p:nvGrpSpPr>
-      <p:grpSpPr>
-        <a:xfrm>
-          <a:off x="0" y="0"/>
-          <a:ext cx="0" cy="0"/>
-          <a:chOff x="0" y="0"/>
-          <a:chExt cx="0" cy="0"/>
-        </a:xfrm>
-      </p:grpSpPr>
-      <p:sp>
-        <p:nvSpPr>
-          <p:cNvPr id="2" name="スライド イメージ プレースホルダー 1"/>
-          <p:cNvSpPr>
-            <a:spLocks noGrp="1" noRot="1" noChangeAspect="1"/>
-          </p:cNvSpPr>
-          <p:nvPr>
-            <p:ph type="sldImg"/>
-          </p:nvPr>
-        </p:nvSpPr>
-        <p:spPr>
-          <a:xfrm>
-            <a:off x="3343275" y="850900"/>
-            <a:ext cx="3240088" cy="2292350"/>
-          </a:xfrm>
-        </p:spPr>
-      </p:sp>
-      <p:sp>
-        <p:nvSpPr>
-          <p:cNvPr id="3" name="ノート プレースホルダー 2"/>
-          <p:cNvSpPr>
-            <a:spLocks noGrp="1"/>
-          </p:cNvSpPr>
-          <p:nvPr>
-            <p:ph type="body" idx="1"/>
-          </p:nvPr>
-        </p:nvSpPr>
-        <p:spPr/>
-        <p:txBody>
-          <a:bodyPr/>
-          <a:lstStyle/>
-          <a:p>
-            <a:endParaRPr kumimoji="1" lang="ja-JP" altLang="en-US"/>
-          </a:p>
-        </p:txBody>
-      </p:sp>
-      <p:sp>
-        <p:nvSpPr>
-          <p:cNvPr id="4" name="スライド番号プレースホルダー 3"/>
-          <p:cNvSpPr>
-            <a:spLocks noGrp="1"/>
-          </p:cNvSpPr>
-          <p:nvPr>
-            <p:ph type="sldNum" sz="quarter" idx="5"/>
-          </p:nvPr>
-        </p:nvSpPr>
-        <p:spPr/>
-        <p:txBody>
-          <a:bodyPr/>
-          <a:lstStyle/>
-          <a:p>
-            <a:fld id="{AF6D15DF-6062-465E-BCC6-9356F01AD1D3}" type="slidenum">
-              <a:rPr kumimoji="1" lang="ja-JP" altLang="en-US" smtClean="0"/>
-              <a:t>15</a:t>
-            </a:fld>
-            <a:endParaRPr kumimoji="1" lang="ja-JP" altLang="en-US"/>
-          </a:p>
-        </p:txBody>
-      </p:sp>
-    </p:spTree>
-    <p:extLst>
-      <p:ext uri="{BB962C8B-B14F-4D97-AF65-F5344CB8AC3E}">
-        <p14:creationId xmlns:p14="http://schemas.microsoft.com/office/powerpoint/2010/main" val="3398587799"/>
-      </p:ext>
-    </p:extLst>
-  </p:cSld>
-  <p:clrMapOvr>
-    <a:masterClrMapping/>
-  </p:clrMapOvr>
-</p:notes>
-</file>
-
-<file path=ppt/notesSlides/notesSlide2.xml><?xml version="1.0" encoding="utf-8"?>
-<p:notes xmlns:a="http://schemas.openxmlformats.org/drawingml/2006/main" xmlns:r="http://schemas.openxmlformats.org/officeDocument/2006/relationships" xmlns:p="http://schemas.openxmlformats.org/presentationml/2006/main">
-  <p:cSld>
-    <p:spTree>
-      <p:nvGrpSpPr>
-        <p:cNvPr id="1" name="">
-          <a:extLst>
-            <a:ext uri="{FF2B5EF4-FFF2-40B4-BE49-F238E27FC236}">
-              <a16:creationId xmlns:a16="http://schemas.microsoft.com/office/drawing/2014/main" id="{AFE6127F-2710-16CC-DC58-B7DDA042D1D6}"/>
-            </a:ext>
-          </a:extLst>
-        </p:cNvPr>
-        <p:cNvGrpSpPr/>
-        <p:nvPr/>
-      </p:nvGrpSpPr>
-      <p:grpSpPr>
-        <a:xfrm>
-          <a:off x="0" y="0"/>
-          <a:ext cx="0" cy="0"/>
-          <a:chOff x="0" y="0"/>
-          <a:chExt cx="0" cy="0"/>
-        </a:xfrm>
-      </p:grpSpPr>
-      <p:sp>
-        <p:nvSpPr>
-          <p:cNvPr id="2" name="スライド イメージ プレースホルダー 1">
-            <a:extLst>
-              <a:ext uri="{FF2B5EF4-FFF2-40B4-BE49-F238E27FC236}">
-                <a16:creationId xmlns:a16="http://schemas.microsoft.com/office/drawing/2014/main" id="{216901F1-B075-7648-04F8-2F1BC97D8038}"/>
-              </a:ext>
-            </a:extLst>
-          </p:cNvPr>
-          <p:cNvSpPr>
-            <a:spLocks noGrp="1" noRot="1" noChangeAspect="1"/>
-          </p:cNvSpPr>
-          <p:nvPr>
-            <p:ph type="sldImg"/>
-          </p:nvPr>
-        </p:nvSpPr>
-        <p:spPr>
-          <a:xfrm>
-            <a:off x="3343275" y="850900"/>
-            <a:ext cx="3240088" cy="2292350"/>
-          </a:xfrm>
-        </p:spPr>
-      </p:sp>
-      <p:sp>
-        <p:nvSpPr>
-          <p:cNvPr id="3" name="ノート プレースホルダー 2">
-            <a:extLst>
-              <a:ext uri="{FF2B5EF4-FFF2-40B4-BE49-F238E27FC236}">
-                <a16:creationId xmlns:a16="http://schemas.microsoft.com/office/drawing/2014/main" id="{0BE26DE7-B591-BB3E-D392-A810F32CD6AB}"/>
-              </a:ext>
-            </a:extLst>
-          </p:cNvPr>
-          <p:cNvSpPr>
-            <a:spLocks noGrp="1"/>
-          </p:cNvSpPr>
-          <p:nvPr>
-            <p:ph type="body" idx="1"/>
-          </p:nvPr>
-        </p:nvSpPr>
-        <p:spPr/>
-        <p:txBody>
-          <a:bodyPr/>
-          <a:lstStyle/>
-          <a:p>
-            <a:endParaRPr kumimoji="1" lang="ja-JP" altLang="en-US"/>
-          </a:p>
-        </p:txBody>
-      </p:sp>
-      <p:sp>
-        <p:nvSpPr>
-          <p:cNvPr id="4" name="スライド番号プレースホルダー 3">
-            <a:extLst>
-              <a:ext uri="{FF2B5EF4-FFF2-40B4-BE49-F238E27FC236}">
-                <a16:creationId xmlns:a16="http://schemas.microsoft.com/office/drawing/2014/main" id="{D6741406-EAD1-39F7-C954-A45319E543E6}"/>
-              </a:ext>
-            </a:extLst>
-          </p:cNvPr>
-          <p:cNvSpPr>
-            <a:spLocks noGrp="1"/>
-          </p:cNvSpPr>
-          <p:nvPr>
-            <p:ph type="sldNum" sz="quarter" idx="5"/>
-          </p:nvPr>
-        </p:nvSpPr>
-        <p:spPr/>
-        <p:txBody>
-          <a:bodyPr/>
-          <a:lstStyle/>
-          <a:p>
-            <a:fld id="{AF6D15DF-6062-465E-BCC6-9356F01AD1D3}" type="slidenum">
-              <a:rPr kumimoji="1" lang="ja-JP" altLang="en-US" smtClean="0"/>
-              <a:t>2</a:t>
-            </a:fld>
-            <a:endParaRPr kumimoji="1" lang="ja-JP" altLang="en-US"/>
-          </a:p>
-        </p:txBody>
-      </p:sp>
-    </p:spTree>
-    <p:extLst>
-      <p:ext uri="{BB962C8B-B14F-4D97-AF65-F5344CB8AC3E}">
-        <p14:creationId xmlns:p14="http://schemas.microsoft.com/office/powerpoint/2010/main" val="2472273254"/>
-      </p:ext>
-    </p:extLst>
-  </p:cSld>
-  <p:clrMapOvr>
-    <a:masterClrMapping/>
-  </p:clrMapOvr>
-</p:notes>
-</file>
-
-<file path=ppt/notesSlides/notesSlide3.xml><?xml version="1.0" encoding="utf-8"?>
-<p:notes xmlns:a="http://schemas.openxmlformats.org/drawingml/2006/main" xmlns:r="http://schemas.openxmlformats.org/officeDocument/2006/relationships" xmlns:p="http://schemas.openxmlformats.org/presentationml/2006/main">
-  <p:cSld>
-    <p:spTree>
-      <p:nvGrpSpPr>
-        <p:cNvPr id="1" name=""/>
-        <p:cNvGrpSpPr/>
-        <p:nvPr/>
-      </p:nvGrpSpPr>
-      <p:grpSpPr>
-        <a:xfrm>
-          <a:off x="0" y="0"/>
-          <a:ext cx="0" cy="0"/>
-          <a:chOff x="0" y="0"/>
-          <a:chExt cx="0" cy="0"/>
-        </a:xfrm>
-      </p:grpSpPr>
-      <p:sp>
-        <p:nvSpPr>
-          <p:cNvPr id="2" name="スライド イメージ プレースホルダー 1"/>
-          <p:cNvSpPr>
-            <a:spLocks noGrp="1" noRot="1" noChangeAspect="1"/>
-          </p:cNvSpPr>
-          <p:nvPr>
-            <p:ph type="sldImg"/>
-          </p:nvPr>
-        </p:nvSpPr>
-        <p:spPr>
-          <a:xfrm>
-            <a:off x="3343275" y="850900"/>
-            <a:ext cx="3240088" cy="2292350"/>
-          </a:xfrm>
-        </p:spPr>
-      </p:sp>
-      <p:sp>
-        <p:nvSpPr>
-          <p:cNvPr id="3" name="ノート プレースホルダー 2"/>
-          <p:cNvSpPr>
-            <a:spLocks noGrp="1"/>
-          </p:cNvSpPr>
-          <p:nvPr>
-            <p:ph type="body" idx="1"/>
-          </p:nvPr>
-        </p:nvSpPr>
-        <p:spPr/>
-        <p:txBody>
-          <a:bodyPr/>
-          <a:lstStyle/>
-          <a:p>
-            <a:endParaRPr kumimoji="1" lang="ja-JP" altLang="en-US"/>
-          </a:p>
-        </p:txBody>
-      </p:sp>
-      <p:sp>
-        <p:nvSpPr>
-          <p:cNvPr id="4" name="スライド番号プレースホルダー 3"/>
-          <p:cNvSpPr>
-            <a:spLocks noGrp="1"/>
-          </p:cNvSpPr>
-          <p:nvPr>
-            <p:ph type="sldNum" sz="quarter" idx="5"/>
-          </p:nvPr>
-        </p:nvSpPr>
-        <p:spPr/>
-        <p:txBody>
-          <a:bodyPr/>
-          <a:lstStyle/>
-          <a:p>
-            <a:fld id="{AF6D15DF-6062-465E-BCC6-9356F01AD1D3}" type="slidenum">
-              <a:rPr kumimoji="1" lang="ja-JP" altLang="en-US" smtClean="0"/>
-              <a:t>3</a:t>
-            </a:fld>
-            <a:endParaRPr kumimoji="1" lang="ja-JP" altLang="en-US"/>
-          </a:p>
-        </p:txBody>
-      </p:sp>
-    </p:spTree>
-    <p:extLst>
-      <p:ext uri="{BB962C8B-B14F-4D97-AF65-F5344CB8AC3E}">
-        <p14:creationId xmlns:p14="http://schemas.microsoft.com/office/powerpoint/2010/main" val="2532633606"/>
-      </p:ext>
-    </p:extLst>
-  </p:cSld>
-  <p:clrMapOvr>
-    <a:masterClrMapping/>
-  </p:clrMapOvr>
-</p:notes>
-</file>
-
-<file path=ppt/notesSlides/notesSlide4.xml><?xml version="1.0" encoding="utf-8"?>
-<p:notes xmlns:a="http://schemas.openxmlformats.org/drawingml/2006/main" xmlns:r="http://schemas.openxmlformats.org/officeDocument/2006/relationships" xmlns:p="http://schemas.openxmlformats.org/presentationml/2006/main">
-  <p:cSld>
-    <p:spTree>
-      <p:nvGrpSpPr>
         <p:cNvPr id="1" name="">
           <a:extLst>
             <a:ext uri="{FF2B5EF4-FFF2-40B4-BE49-F238E27FC236}">
@@ -1732,7 +811,7 @@
           <a:p>
             <a:fld id="{AF6D15DF-6062-465E-BCC6-9356F01AD1D3}" type="slidenum">
               <a:rPr kumimoji="1" lang="ja-JP" altLang="en-US" smtClean="0"/>
-              <a:t>4</a:t>
+              <a:t>1</a:t>
             </a:fld>
             <a:endParaRPr kumimoji="1" lang="ja-JP" altLang="en-US"/>
           </a:p>
@@ -1742,571 +821,6 @@
     <p:extLst>
       <p:ext uri="{BB962C8B-B14F-4D97-AF65-F5344CB8AC3E}">
         <p14:creationId xmlns:p14="http://schemas.microsoft.com/office/powerpoint/2010/main" val="705787550"/>
-      </p:ext>
-    </p:extLst>
-  </p:cSld>
-  <p:clrMapOvr>
-    <a:masterClrMapping/>
-  </p:clrMapOvr>
-</p:notes>
-</file>
-
-<file path=ppt/notesSlides/notesSlide5.xml><?xml version="1.0" encoding="utf-8"?>
-<p:notes xmlns:a="http://schemas.openxmlformats.org/drawingml/2006/main" xmlns:r="http://schemas.openxmlformats.org/officeDocument/2006/relationships" xmlns:p="http://schemas.openxmlformats.org/presentationml/2006/main">
-  <p:cSld>
-    <p:spTree>
-      <p:nvGrpSpPr>
-        <p:cNvPr id="1" name="">
-          <a:extLst>
-            <a:ext uri="{FF2B5EF4-FFF2-40B4-BE49-F238E27FC236}">
-              <a16:creationId xmlns:a16="http://schemas.microsoft.com/office/drawing/2014/main" id="{B93D7E9C-D294-02B3-0D59-410B4F21A948}"/>
-            </a:ext>
-          </a:extLst>
-        </p:cNvPr>
-        <p:cNvGrpSpPr/>
-        <p:nvPr/>
-      </p:nvGrpSpPr>
-      <p:grpSpPr>
-        <a:xfrm>
-          <a:off x="0" y="0"/>
-          <a:ext cx="0" cy="0"/>
-          <a:chOff x="0" y="0"/>
-          <a:chExt cx="0" cy="0"/>
-        </a:xfrm>
-      </p:grpSpPr>
-      <p:sp>
-        <p:nvSpPr>
-          <p:cNvPr id="2" name="スライド イメージ プレースホルダー 1">
-            <a:extLst>
-              <a:ext uri="{FF2B5EF4-FFF2-40B4-BE49-F238E27FC236}">
-                <a16:creationId xmlns:a16="http://schemas.microsoft.com/office/drawing/2014/main" id="{12DFEA52-1CBF-7394-0EC5-E3376C382B07}"/>
-              </a:ext>
-            </a:extLst>
-          </p:cNvPr>
-          <p:cNvSpPr>
-            <a:spLocks noGrp="1" noRot="1" noChangeAspect="1"/>
-          </p:cNvSpPr>
-          <p:nvPr>
-            <p:ph type="sldImg"/>
-          </p:nvPr>
-        </p:nvSpPr>
-        <p:spPr>
-          <a:xfrm>
-            <a:off x="3343275" y="850900"/>
-            <a:ext cx="3240088" cy="2292350"/>
-          </a:xfrm>
-        </p:spPr>
-      </p:sp>
-      <p:sp>
-        <p:nvSpPr>
-          <p:cNvPr id="3" name="ノート プレースホルダー 2">
-            <a:extLst>
-              <a:ext uri="{FF2B5EF4-FFF2-40B4-BE49-F238E27FC236}">
-                <a16:creationId xmlns:a16="http://schemas.microsoft.com/office/drawing/2014/main" id="{7037215E-68AB-A98A-D995-C80D87514A0D}"/>
-              </a:ext>
-            </a:extLst>
-          </p:cNvPr>
-          <p:cNvSpPr>
-            <a:spLocks noGrp="1"/>
-          </p:cNvSpPr>
-          <p:nvPr>
-            <p:ph type="body" idx="1"/>
-          </p:nvPr>
-        </p:nvSpPr>
-        <p:spPr/>
-        <p:txBody>
-          <a:bodyPr/>
-          <a:lstStyle/>
-          <a:p>
-            <a:endParaRPr kumimoji="1" lang="ja-JP" altLang="en-US"/>
-          </a:p>
-        </p:txBody>
-      </p:sp>
-      <p:sp>
-        <p:nvSpPr>
-          <p:cNvPr id="4" name="スライド番号プレースホルダー 3">
-            <a:extLst>
-              <a:ext uri="{FF2B5EF4-FFF2-40B4-BE49-F238E27FC236}">
-                <a16:creationId xmlns:a16="http://schemas.microsoft.com/office/drawing/2014/main" id="{D41AE6EC-812C-EE8C-09B9-4C0B7989E5E2}"/>
-              </a:ext>
-            </a:extLst>
-          </p:cNvPr>
-          <p:cNvSpPr>
-            <a:spLocks noGrp="1"/>
-          </p:cNvSpPr>
-          <p:nvPr>
-            <p:ph type="sldNum" sz="quarter" idx="5"/>
-          </p:nvPr>
-        </p:nvSpPr>
-        <p:spPr/>
-        <p:txBody>
-          <a:bodyPr/>
-          <a:lstStyle/>
-          <a:p>
-            <a:fld id="{AF6D15DF-6062-465E-BCC6-9356F01AD1D3}" type="slidenum">
-              <a:rPr kumimoji="1" lang="ja-JP" altLang="en-US" smtClean="0"/>
-              <a:t>5</a:t>
-            </a:fld>
-            <a:endParaRPr kumimoji="1" lang="ja-JP" altLang="en-US"/>
-          </a:p>
-        </p:txBody>
-      </p:sp>
-    </p:spTree>
-    <p:extLst>
-      <p:ext uri="{BB962C8B-B14F-4D97-AF65-F5344CB8AC3E}">
-        <p14:creationId xmlns:p14="http://schemas.microsoft.com/office/powerpoint/2010/main" val="383705492"/>
-      </p:ext>
-    </p:extLst>
-  </p:cSld>
-  <p:clrMapOvr>
-    <a:masterClrMapping/>
-  </p:clrMapOvr>
-</p:notes>
-</file>
-
-<file path=ppt/notesSlides/notesSlide6.xml><?xml version="1.0" encoding="utf-8"?>
-<p:notes xmlns:a="http://schemas.openxmlformats.org/drawingml/2006/main" xmlns:r="http://schemas.openxmlformats.org/officeDocument/2006/relationships" xmlns:p="http://schemas.openxmlformats.org/presentationml/2006/main">
-  <p:cSld>
-    <p:spTree>
-      <p:nvGrpSpPr>
-        <p:cNvPr id="1" name="">
-          <a:extLst>
-            <a:ext uri="{FF2B5EF4-FFF2-40B4-BE49-F238E27FC236}">
-              <a16:creationId xmlns:a16="http://schemas.microsoft.com/office/drawing/2014/main" id="{F45E6469-058A-73D8-B9D4-2EBE9C8148FA}"/>
-            </a:ext>
-          </a:extLst>
-        </p:cNvPr>
-        <p:cNvGrpSpPr/>
-        <p:nvPr/>
-      </p:nvGrpSpPr>
-      <p:grpSpPr>
-        <a:xfrm>
-          <a:off x="0" y="0"/>
-          <a:ext cx="0" cy="0"/>
-          <a:chOff x="0" y="0"/>
-          <a:chExt cx="0" cy="0"/>
-        </a:xfrm>
-      </p:grpSpPr>
-      <p:sp>
-        <p:nvSpPr>
-          <p:cNvPr id="2" name="スライド イメージ プレースホルダー 1">
-            <a:extLst>
-              <a:ext uri="{FF2B5EF4-FFF2-40B4-BE49-F238E27FC236}">
-                <a16:creationId xmlns:a16="http://schemas.microsoft.com/office/drawing/2014/main" id="{8ED4528E-BC26-6012-7019-A74068F9D426}"/>
-              </a:ext>
-            </a:extLst>
-          </p:cNvPr>
-          <p:cNvSpPr>
-            <a:spLocks noGrp="1" noRot="1" noChangeAspect="1"/>
-          </p:cNvSpPr>
-          <p:nvPr>
-            <p:ph type="sldImg"/>
-          </p:nvPr>
-        </p:nvSpPr>
-        <p:spPr>
-          <a:xfrm>
-            <a:off x="3343275" y="850900"/>
-            <a:ext cx="3240088" cy="2292350"/>
-          </a:xfrm>
-        </p:spPr>
-      </p:sp>
-      <p:sp>
-        <p:nvSpPr>
-          <p:cNvPr id="3" name="ノート プレースホルダー 2">
-            <a:extLst>
-              <a:ext uri="{FF2B5EF4-FFF2-40B4-BE49-F238E27FC236}">
-                <a16:creationId xmlns:a16="http://schemas.microsoft.com/office/drawing/2014/main" id="{6B3158F3-B00A-97A0-4A29-AE5AB028DA58}"/>
-              </a:ext>
-            </a:extLst>
-          </p:cNvPr>
-          <p:cNvSpPr>
-            <a:spLocks noGrp="1"/>
-          </p:cNvSpPr>
-          <p:nvPr>
-            <p:ph type="body" idx="1"/>
-          </p:nvPr>
-        </p:nvSpPr>
-        <p:spPr/>
-        <p:txBody>
-          <a:bodyPr/>
-          <a:lstStyle/>
-          <a:p>
-            <a:endParaRPr kumimoji="1" lang="ja-JP" altLang="en-US"/>
-          </a:p>
-        </p:txBody>
-      </p:sp>
-      <p:sp>
-        <p:nvSpPr>
-          <p:cNvPr id="4" name="スライド番号プレースホルダー 3">
-            <a:extLst>
-              <a:ext uri="{FF2B5EF4-FFF2-40B4-BE49-F238E27FC236}">
-                <a16:creationId xmlns:a16="http://schemas.microsoft.com/office/drawing/2014/main" id="{3C928B77-46E1-390D-3D51-6AD44515CD16}"/>
-              </a:ext>
-            </a:extLst>
-          </p:cNvPr>
-          <p:cNvSpPr>
-            <a:spLocks noGrp="1"/>
-          </p:cNvSpPr>
-          <p:nvPr>
-            <p:ph type="sldNum" sz="quarter" idx="5"/>
-          </p:nvPr>
-        </p:nvSpPr>
-        <p:spPr/>
-        <p:txBody>
-          <a:bodyPr/>
-          <a:lstStyle/>
-          <a:p>
-            <a:fld id="{AF6D15DF-6062-465E-BCC6-9356F01AD1D3}" type="slidenum">
-              <a:rPr kumimoji="1" lang="ja-JP" altLang="en-US" smtClean="0"/>
-              <a:t>6</a:t>
-            </a:fld>
-            <a:endParaRPr kumimoji="1" lang="ja-JP" altLang="en-US"/>
-          </a:p>
-        </p:txBody>
-      </p:sp>
-    </p:spTree>
-    <p:extLst>
-      <p:ext uri="{BB962C8B-B14F-4D97-AF65-F5344CB8AC3E}">
-        <p14:creationId xmlns:p14="http://schemas.microsoft.com/office/powerpoint/2010/main" val="1184362291"/>
-      </p:ext>
-    </p:extLst>
-  </p:cSld>
-  <p:clrMapOvr>
-    <a:masterClrMapping/>
-  </p:clrMapOvr>
-</p:notes>
-</file>
-
-<file path=ppt/notesSlides/notesSlide7.xml><?xml version="1.0" encoding="utf-8"?>
-<p:notes xmlns:a="http://schemas.openxmlformats.org/drawingml/2006/main" xmlns:r="http://schemas.openxmlformats.org/officeDocument/2006/relationships" xmlns:p="http://schemas.openxmlformats.org/presentationml/2006/main">
-  <p:cSld>
-    <p:spTree>
-      <p:nvGrpSpPr>
-        <p:cNvPr id="1" name="">
-          <a:extLst>
-            <a:ext uri="{FF2B5EF4-FFF2-40B4-BE49-F238E27FC236}">
-              <a16:creationId xmlns:a16="http://schemas.microsoft.com/office/drawing/2014/main" id="{866E37F8-12D3-66B7-9331-7BFD7868E9FE}"/>
-            </a:ext>
-          </a:extLst>
-        </p:cNvPr>
-        <p:cNvGrpSpPr/>
-        <p:nvPr/>
-      </p:nvGrpSpPr>
-      <p:grpSpPr>
-        <a:xfrm>
-          <a:off x="0" y="0"/>
-          <a:ext cx="0" cy="0"/>
-          <a:chOff x="0" y="0"/>
-          <a:chExt cx="0" cy="0"/>
-        </a:xfrm>
-      </p:grpSpPr>
-      <p:sp>
-        <p:nvSpPr>
-          <p:cNvPr id="2" name="スライド イメージ プレースホルダー 1">
-            <a:extLst>
-              <a:ext uri="{FF2B5EF4-FFF2-40B4-BE49-F238E27FC236}">
-                <a16:creationId xmlns:a16="http://schemas.microsoft.com/office/drawing/2014/main" id="{371481AD-56F2-2832-D89D-5117F7175E56}"/>
-              </a:ext>
-            </a:extLst>
-          </p:cNvPr>
-          <p:cNvSpPr>
-            <a:spLocks noGrp="1" noRot="1" noChangeAspect="1"/>
-          </p:cNvSpPr>
-          <p:nvPr>
-            <p:ph type="sldImg"/>
-          </p:nvPr>
-        </p:nvSpPr>
-        <p:spPr>
-          <a:xfrm>
-            <a:off x="3343275" y="850900"/>
-            <a:ext cx="3240088" cy="2292350"/>
-          </a:xfrm>
-        </p:spPr>
-      </p:sp>
-      <p:sp>
-        <p:nvSpPr>
-          <p:cNvPr id="3" name="ノート プレースホルダー 2">
-            <a:extLst>
-              <a:ext uri="{FF2B5EF4-FFF2-40B4-BE49-F238E27FC236}">
-                <a16:creationId xmlns:a16="http://schemas.microsoft.com/office/drawing/2014/main" id="{4104E0ED-49F1-5333-2FD0-5327BB5C96F7}"/>
-              </a:ext>
-            </a:extLst>
-          </p:cNvPr>
-          <p:cNvSpPr>
-            <a:spLocks noGrp="1"/>
-          </p:cNvSpPr>
-          <p:nvPr>
-            <p:ph type="body" idx="1"/>
-          </p:nvPr>
-        </p:nvSpPr>
-        <p:spPr/>
-        <p:txBody>
-          <a:bodyPr/>
-          <a:lstStyle/>
-          <a:p>
-            <a:endParaRPr kumimoji="1" lang="ja-JP" altLang="en-US"/>
-          </a:p>
-        </p:txBody>
-      </p:sp>
-      <p:sp>
-        <p:nvSpPr>
-          <p:cNvPr id="4" name="スライド番号プレースホルダー 3">
-            <a:extLst>
-              <a:ext uri="{FF2B5EF4-FFF2-40B4-BE49-F238E27FC236}">
-                <a16:creationId xmlns:a16="http://schemas.microsoft.com/office/drawing/2014/main" id="{44CE0E35-B00B-BC1D-BF41-4B5337FE0D0A}"/>
-              </a:ext>
-            </a:extLst>
-          </p:cNvPr>
-          <p:cNvSpPr>
-            <a:spLocks noGrp="1"/>
-          </p:cNvSpPr>
-          <p:nvPr>
-            <p:ph type="sldNum" sz="quarter" idx="5"/>
-          </p:nvPr>
-        </p:nvSpPr>
-        <p:spPr/>
-        <p:txBody>
-          <a:bodyPr/>
-          <a:lstStyle/>
-          <a:p>
-            <a:fld id="{AF6D15DF-6062-465E-BCC6-9356F01AD1D3}" type="slidenum">
-              <a:rPr kumimoji="1" lang="ja-JP" altLang="en-US" smtClean="0"/>
-              <a:t>7</a:t>
-            </a:fld>
-            <a:endParaRPr kumimoji="1" lang="ja-JP" altLang="en-US"/>
-          </a:p>
-        </p:txBody>
-      </p:sp>
-    </p:spTree>
-    <p:extLst>
-      <p:ext uri="{BB962C8B-B14F-4D97-AF65-F5344CB8AC3E}">
-        <p14:creationId xmlns:p14="http://schemas.microsoft.com/office/powerpoint/2010/main" val="3603253182"/>
-      </p:ext>
-    </p:extLst>
-  </p:cSld>
-  <p:clrMapOvr>
-    <a:masterClrMapping/>
-  </p:clrMapOvr>
-</p:notes>
-</file>
-
-<file path=ppt/notesSlides/notesSlide8.xml><?xml version="1.0" encoding="utf-8"?>
-<p:notes xmlns:a="http://schemas.openxmlformats.org/drawingml/2006/main" xmlns:r="http://schemas.openxmlformats.org/officeDocument/2006/relationships" xmlns:p="http://schemas.openxmlformats.org/presentationml/2006/main">
-  <p:cSld>
-    <p:spTree>
-      <p:nvGrpSpPr>
-        <p:cNvPr id="1" name="">
-          <a:extLst>
-            <a:ext uri="{FF2B5EF4-FFF2-40B4-BE49-F238E27FC236}">
-              <a16:creationId xmlns:a16="http://schemas.microsoft.com/office/drawing/2014/main" id="{E0B761B8-6044-5265-668F-62D0F238D1CD}"/>
-            </a:ext>
-          </a:extLst>
-        </p:cNvPr>
-        <p:cNvGrpSpPr/>
-        <p:nvPr/>
-      </p:nvGrpSpPr>
-      <p:grpSpPr>
-        <a:xfrm>
-          <a:off x="0" y="0"/>
-          <a:ext cx="0" cy="0"/>
-          <a:chOff x="0" y="0"/>
-          <a:chExt cx="0" cy="0"/>
-        </a:xfrm>
-      </p:grpSpPr>
-      <p:sp>
-        <p:nvSpPr>
-          <p:cNvPr id="2" name="スライド イメージ プレースホルダー 1">
-            <a:extLst>
-              <a:ext uri="{FF2B5EF4-FFF2-40B4-BE49-F238E27FC236}">
-                <a16:creationId xmlns:a16="http://schemas.microsoft.com/office/drawing/2014/main" id="{0B656796-B684-C2D9-224A-1E61EF75CE5C}"/>
-              </a:ext>
-            </a:extLst>
-          </p:cNvPr>
-          <p:cNvSpPr>
-            <a:spLocks noGrp="1" noRot="1" noChangeAspect="1"/>
-          </p:cNvSpPr>
-          <p:nvPr>
-            <p:ph type="sldImg"/>
-          </p:nvPr>
-        </p:nvSpPr>
-        <p:spPr>
-          <a:xfrm>
-            <a:off x="3343275" y="850900"/>
-            <a:ext cx="3240088" cy="2292350"/>
-          </a:xfrm>
-        </p:spPr>
-      </p:sp>
-      <p:sp>
-        <p:nvSpPr>
-          <p:cNvPr id="3" name="ノート プレースホルダー 2">
-            <a:extLst>
-              <a:ext uri="{FF2B5EF4-FFF2-40B4-BE49-F238E27FC236}">
-                <a16:creationId xmlns:a16="http://schemas.microsoft.com/office/drawing/2014/main" id="{3C0EA8AF-D13E-15E9-02BC-85AA388D4A6C}"/>
-              </a:ext>
-            </a:extLst>
-          </p:cNvPr>
-          <p:cNvSpPr>
-            <a:spLocks noGrp="1"/>
-          </p:cNvSpPr>
-          <p:nvPr>
-            <p:ph type="body" idx="1"/>
-          </p:nvPr>
-        </p:nvSpPr>
-        <p:spPr/>
-        <p:txBody>
-          <a:bodyPr/>
-          <a:lstStyle/>
-          <a:p>
-            <a:endParaRPr kumimoji="1" lang="ja-JP" altLang="en-US"/>
-          </a:p>
-        </p:txBody>
-      </p:sp>
-      <p:sp>
-        <p:nvSpPr>
-          <p:cNvPr id="4" name="スライド番号プレースホルダー 3">
-            <a:extLst>
-              <a:ext uri="{FF2B5EF4-FFF2-40B4-BE49-F238E27FC236}">
-                <a16:creationId xmlns:a16="http://schemas.microsoft.com/office/drawing/2014/main" id="{8FB1ACFF-D7DA-6FC5-7581-168C722B8149}"/>
-              </a:ext>
-            </a:extLst>
-          </p:cNvPr>
-          <p:cNvSpPr>
-            <a:spLocks noGrp="1"/>
-          </p:cNvSpPr>
-          <p:nvPr>
-            <p:ph type="sldNum" sz="quarter" idx="5"/>
-          </p:nvPr>
-        </p:nvSpPr>
-        <p:spPr/>
-        <p:txBody>
-          <a:bodyPr/>
-          <a:lstStyle/>
-          <a:p>
-            <a:fld id="{AF6D15DF-6062-465E-BCC6-9356F01AD1D3}" type="slidenum">
-              <a:rPr kumimoji="1" lang="ja-JP" altLang="en-US" smtClean="0"/>
-              <a:t>8</a:t>
-            </a:fld>
-            <a:endParaRPr kumimoji="1" lang="ja-JP" altLang="en-US"/>
-          </a:p>
-        </p:txBody>
-      </p:sp>
-    </p:spTree>
-    <p:extLst>
-      <p:ext uri="{BB962C8B-B14F-4D97-AF65-F5344CB8AC3E}">
-        <p14:creationId xmlns:p14="http://schemas.microsoft.com/office/powerpoint/2010/main" val="2385634523"/>
-      </p:ext>
-    </p:extLst>
-  </p:cSld>
-  <p:clrMapOvr>
-    <a:masterClrMapping/>
-  </p:clrMapOvr>
-</p:notes>
-</file>
-
-<file path=ppt/notesSlides/notesSlide9.xml><?xml version="1.0" encoding="utf-8"?>
-<p:notes xmlns:a="http://schemas.openxmlformats.org/drawingml/2006/main" xmlns:r="http://schemas.openxmlformats.org/officeDocument/2006/relationships" xmlns:p="http://schemas.openxmlformats.org/presentationml/2006/main">
-  <p:cSld>
-    <p:spTree>
-      <p:nvGrpSpPr>
-        <p:cNvPr id="1" name="">
-          <a:extLst>
-            <a:ext uri="{FF2B5EF4-FFF2-40B4-BE49-F238E27FC236}">
-              <a16:creationId xmlns:a16="http://schemas.microsoft.com/office/drawing/2014/main" id="{4AE4A699-4B53-D0FC-3D0A-E9DA9095E58A}"/>
-            </a:ext>
-          </a:extLst>
-        </p:cNvPr>
-        <p:cNvGrpSpPr/>
-        <p:nvPr/>
-      </p:nvGrpSpPr>
-      <p:grpSpPr>
-        <a:xfrm>
-          <a:off x="0" y="0"/>
-          <a:ext cx="0" cy="0"/>
-          <a:chOff x="0" y="0"/>
-          <a:chExt cx="0" cy="0"/>
-        </a:xfrm>
-      </p:grpSpPr>
-      <p:sp>
-        <p:nvSpPr>
-          <p:cNvPr id="2" name="スライド イメージ プレースホルダー 1">
-            <a:extLst>
-              <a:ext uri="{FF2B5EF4-FFF2-40B4-BE49-F238E27FC236}">
-                <a16:creationId xmlns:a16="http://schemas.microsoft.com/office/drawing/2014/main" id="{16CF9BCD-7E25-A5F3-DC5B-AD51CC526CB9}"/>
-              </a:ext>
-            </a:extLst>
-          </p:cNvPr>
-          <p:cNvSpPr>
-            <a:spLocks noGrp="1" noRot="1" noChangeAspect="1"/>
-          </p:cNvSpPr>
-          <p:nvPr>
-            <p:ph type="sldImg"/>
-          </p:nvPr>
-        </p:nvSpPr>
-        <p:spPr>
-          <a:xfrm>
-            <a:off x="3343275" y="850900"/>
-            <a:ext cx="3240088" cy="2292350"/>
-          </a:xfrm>
-        </p:spPr>
-      </p:sp>
-      <p:sp>
-        <p:nvSpPr>
-          <p:cNvPr id="3" name="ノート プレースホルダー 2">
-            <a:extLst>
-              <a:ext uri="{FF2B5EF4-FFF2-40B4-BE49-F238E27FC236}">
-                <a16:creationId xmlns:a16="http://schemas.microsoft.com/office/drawing/2014/main" id="{410CE769-9420-8C86-056B-70AE3A0FDA6E}"/>
-              </a:ext>
-            </a:extLst>
-          </p:cNvPr>
-          <p:cNvSpPr>
-            <a:spLocks noGrp="1"/>
-          </p:cNvSpPr>
-          <p:nvPr>
-            <p:ph type="body" idx="1"/>
-          </p:nvPr>
-        </p:nvSpPr>
-        <p:spPr/>
-        <p:txBody>
-          <a:bodyPr/>
-          <a:lstStyle/>
-          <a:p>
-            <a:endParaRPr kumimoji="1" lang="ja-JP" altLang="en-US"/>
-          </a:p>
-        </p:txBody>
-      </p:sp>
-      <p:sp>
-        <p:nvSpPr>
-          <p:cNvPr id="4" name="スライド番号プレースホルダー 3">
-            <a:extLst>
-              <a:ext uri="{FF2B5EF4-FFF2-40B4-BE49-F238E27FC236}">
-                <a16:creationId xmlns:a16="http://schemas.microsoft.com/office/drawing/2014/main" id="{68D6E537-CFFA-5DFE-4E60-3BC6001B3904}"/>
-              </a:ext>
-            </a:extLst>
-          </p:cNvPr>
-          <p:cNvSpPr>
-            <a:spLocks noGrp="1"/>
-          </p:cNvSpPr>
-          <p:nvPr>
-            <p:ph type="sldNum" sz="quarter" idx="5"/>
-          </p:nvPr>
-        </p:nvSpPr>
-        <p:spPr/>
-        <p:txBody>
-          <a:bodyPr/>
-          <a:lstStyle/>
-          <a:p>
-            <a:fld id="{AF6D15DF-6062-465E-BCC6-9356F01AD1D3}" type="slidenum">
-              <a:rPr kumimoji="1" lang="ja-JP" altLang="en-US" smtClean="0"/>
-              <a:t>9</a:t>
-            </a:fld>
-            <a:endParaRPr kumimoji="1" lang="ja-JP" altLang="en-US"/>
-          </a:p>
-        </p:txBody>
-      </p:sp>
-    </p:spTree>
-    <p:extLst>
-      <p:ext uri="{BB962C8B-B14F-4D97-AF65-F5344CB8AC3E}">
-        <p14:creationId xmlns:p14="http://schemas.microsoft.com/office/powerpoint/2010/main" val="1991158308"/>
       </p:ext>
     </p:extLst>
   </p:cSld>
@@ -21770,15 +20284,15 @@
 </p:sldMaster>
 </file>
 
-<file path=ppt/slides/slide4.xml><?xml version="1.0" encoding="utf-8"?>
-<p:sld xmlns:a="http://schemas.openxmlformats.org/drawingml/2006/main" xmlns:ns2="http://schemas.microsoft.com/office/drawing/2014/main" xmlns:ns3="http://schemas.microsoft.com/office/powerpoint/2010/main" xmlns:p="http://schemas.openxmlformats.org/presentationml/2006/main">
+<file path=ppt/slides/slide1.xml><?xml version="1.0" encoding="utf-8"?>
+<p:sld xmlns:a="http://schemas.openxmlformats.org/drawingml/2006/main" xmlns:r="http://schemas.openxmlformats.org/officeDocument/2006/relationships" xmlns:p="http://schemas.openxmlformats.org/presentationml/2006/main">
   <p:cSld>
     <p:spTree>
       <p:nvGrpSpPr>
         <p:cNvPr id="1" name="">
           <a:extLst>
             <a:ext uri="{FF2B5EF4-FFF2-40B4-BE49-F238E27FC236}">
-              <ns2:creationId id="{AAF458F5-A81B-84D6-F7A5-159FF9CBBAA3}"/>
+              <a16:creationId xmlns:a16="http://schemas.microsoft.com/office/drawing/2014/main" id="{AAF458F5-A81B-84D6-F7A5-159FF9CBBAA3}"/>
             </a:ext>
           </a:extLst>
         </p:cNvPr>
@@ -21798,7 +20312,7 @@
           <p:cNvPr id="4" name="Title 1">
             <a:extLst>
               <a:ext uri="{FF2B5EF4-FFF2-40B4-BE49-F238E27FC236}">
-                <ns2:creationId id="{F6CF9AE3-9F4C-B879-936D-5958A9C54F4A}"/>
+                <a16:creationId xmlns:a16="http://schemas.microsoft.com/office/drawing/2014/main" id="{F6CF9AE3-9F4C-B879-936D-5958A9C54F4A}"/>
               </a:ext>
             </a:extLst>
           </p:cNvPr>
@@ -21818,10 +20332,6 @@
           <a:bodyPr/>
           <a:lstStyle/>
           <a:p>
-            <a:r>
-              <a:rPr lang="ja-JP" altLang="en-US" spc="-54"/>
-              <a:t/>
-            </a:r>
             <a:br>
               <a:rPr lang="ja-JP" altLang="en-US" sz="2200" spc="-54"/>
             </a:br>
@@ -21834,7 +20344,7 @@
           <p:cNvPr id="5" name="Text Placeholder 2">
             <a:extLst>
               <a:ext uri="{FF2B5EF4-FFF2-40B4-BE49-F238E27FC236}">
-                <ns2:creationId id="{EB2A8FEE-8E0B-512C-9DB7-5E18155BD595}"/>
+                <a16:creationId xmlns:a16="http://schemas.microsoft.com/office/drawing/2014/main" id="{EB2A8FEE-8E0B-512C-9DB7-5E18155BD595}"/>
               </a:ext>
             </a:extLst>
           </p:cNvPr>
@@ -21858,42 +20368,7 @@
           <a:bodyPr/>
           <a:lstStyle/>
           <a:p>
-            <a:r>
-              <a:rPr lang="ja-JP" altLang="en-US" b="1">
-                <a:latin typeface="Yu Gothic UI" panose="020B0500000000000000" pitchFamily="50" charset="-128"/>
-                <a:ea typeface="Yu Gothic UI" panose="020B0500000000000000" pitchFamily="50" charset="-128"/>
-              </a:rPr>
-              <a:t/>
-            </a:r>
-            <a:r>
-              <a:rPr lang="en-US" altLang="ja-JP" b="1">
-                <a:latin typeface="Yu Gothic UI" panose="020B0500000000000000" pitchFamily="50" charset="-128"/>
-                <a:ea typeface="Yu Gothic UI" panose="020B0500000000000000" pitchFamily="50" charset="-128"/>
-              </a:rPr>
-              <a:t/>
-            </a:r>
-            <a:r>
-              <a:rPr lang="ja-JP" altLang="en-US" b="1">
-                <a:latin typeface="Yu Gothic UI" panose="020B0500000000000000" pitchFamily="50" charset="-128"/>
-                <a:ea typeface="Yu Gothic UI" panose="020B0500000000000000" pitchFamily="50" charset="-128"/>
-              </a:rPr>
-              <a:t/>
-            </a:r>
-            <a:r>
-              <a:rPr lang="en-US" altLang="ja-JP" b="1">
-                <a:latin typeface="Yu Gothic UI" panose="020B0500000000000000" pitchFamily="50" charset="-128"/>
-                <a:ea typeface="Yu Gothic UI" panose="020B0500000000000000" pitchFamily="50" charset="-128"/>
-              </a:rPr>
-              <a:t/>
-            </a:r>
-            <a:r>
-              <a:rPr lang="ja-JP" altLang="en-US" b="1">
-                <a:latin typeface="Yu Gothic UI" panose="020B0500000000000000" pitchFamily="50" charset="-128"/>
-                <a:ea typeface="Yu Gothic UI" panose="020B0500000000000000" pitchFamily="50" charset="-128"/>
-              </a:rPr>
-              <a:t/>
-            </a:r>
-            <a:endParaRPr lang="en-US" altLang="ja-JP" sz="1400" b="1"/>
+            <a:endParaRPr lang="en-US" altLang="ja-JP" sz="1400" b="1" dirty="0"/>
           </a:p>
         </p:txBody>
       </p:sp>
@@ -21902,7 +20377,7 @@
           <p:cNvPr id="72" name="object 8">
             <a:extLst>
               <a:ext uri="{FF2B5EF4-FFF2-40B4-BE49-F238E27FC236}">
-                <ns2:creationId id="{BFD69264-C250-F2C8-E86F-DDA5373E5189}"/>
+                <a16:creationId xmlns:a16="http://schemas.microsoft.com/office/drawing/2014/main" id="{BFD69264-C250-F2C8-E86F-DDA5373E5189}"/>
               </a:ext>
             </a:extLst>
           </p:cNvPr>
@@ -21911,8 +20386,8 @@
         </p:nvSpPr>
         <p:spPr>
           <a:xfrm>
-            <a:off x="373252" y="1700387"/>
-            <a:ext cx="4779773" cy="45719"/>
+            <a:off x="355917" y="1700387"/>
+            <a:ext cx="6120000" cy="45719"/>
           </a:xfrm>
           <a:custGeom>
             <a:avLst/>
@@ -21954,71 +20429,10 @@
       </p:sp>
       <p:sp>
         <p:nvSpPr>
-          <p:cNvPr id="2" name="正方形/長方形 1">
-            <a:extLst>
-              <a:ext uri="{FF2B5EF4-FFF2-40B4-BE49-F238E27FC236}">
-                <ns2:creationId id="{5EA595C6-B86A-43F5-8BCA-BBB4171C8C3B}"/>
-              </a:ext>
-            </a:extLst>
-          </p:cNvPr>
-          <p:cNvSpPr/>
-          <p:nvPr/>
-        </p:nvSpPr>
-        <p:spPr>
-          <a:xfrm>
-            <a:off x="371474" y="1756847"/>
-            <a:ext cx="4781551" cy="5155943"/>
-          </a:xfrm>
-          <a:prstGeom prst="rect">
-            <a:avLst/>
-          </a:prstGeom>
-          <a:solidFill>
-            <a:schemeClr val="accent2">
-              <a:lumMod val="20000"/>
-              <a:lumOff val="80000"/>
-            </a:schemeClr>
-          </a:solidFill>
-          <a:ln>
-            <a:solidFill>
-              <a:schemeClr val="accent2"/>
-            </a:solidFill>
-          </a:ln>
-        </p:spPr>
-        <p:style>
-          <a:lnRef idx="2">
-            <a:schemeClr val="accent1">
-              <a:shade val="50000"/>
-            </a:schemeClr>
-          </a:lnRef>
-          <a:fillRef idx="1">
-            <a:schemeClr val="accent1"/>
-          </a:fillRef>
-          <a:effectRef idx="0">
-            <a:schemeClr val="accent1"/>
-          </a:effectRef>
-          <a:fontRef idx="minor">
-            <a:schemeClr val="lt1"/>
-          </a:fontRef>
-        </p:style>
-        <p:txBody>
-          <a:bodyPr rtlCol="0" anchor="ctr"/>
-          <a:lstStyle/>
-          <a:p>
-            <a:pPr algn="l"/>
-            <a:endParaRPr kumimoji="1" lang="en-US" altLang="ja-JP" sz="1295">
-              <a:solidFill>
-                <a:schemeClr val="tx1"/>
-              </a:solidFill>
-            </a:endParaRPr>
-          </a:p>
-        </p:txBody>
-      </p:sp>
-      <p:sp>
-        <p:nvSpPr>
           <p:cNvPr id="7" name="Source 3">
             <a:extLst>
               <a:ext uri="{FF2B5EF4-FFF2-40B4-BE49-F238E27FC236}">
-                <ns2:creationId id="{033AAEFA-A36C-24D9-39CB-B899DF757F9C}"/>
+                <a16:creationId xmlns:a16="http://schemas.microsoft.com/office/drawing/2014/main" id="{033AAEFA-A36C-24D9-39CB-B899DF757F9C}"/>
               </a:ext>
             </a:extLst>
           </p:cNvPr>
@@ -22039,10 +20453,6 @@
           <a:bodyPr numCol="2" anchor="t" anchorCtr="0"/>
           <a:lstStyle/>
           <a:p>
-            <a:r>
-              <a:rPr kumimoji="1" lang="ja-JP" altLang="en-US" sz="600"/>
-              <a:t/>
-            </a:r>
             <a:endParaRPr kumimoji="1" lang="en-US" altLang="ja-JP" sz="600"/>
           </a:p>
           <a:p>
@@ -22050,40 +20460,23 @@
               <a:buFont typeface="+mj-lt"/>
               <a:buAutoNum type="arabicPeriod"/>
             </a:pPr>
-            <a:r>
-              <a:rPr kumimoji="1" lang="ja-JP" altLang="en-US" sz="600"/>
-              <a:t/>
-            </a:r>
-            <a:r>
-              <a:rPr kumimoji="1" lang="en-US" altLang="ja-JP" sz="600"/>
-              <a:t/>
-            </a:r>
+            <a:endParaRPr kumimoji="1" lang="en-US" altLang="ja-JP" sz="600"/>
           </a:p>
           <a:p>
             <a:pPr marL="246720" indent="-246720">
               <a:buFont typeface="+mj-lt"/>
               <a:buAutoNum type="arabicPeriod"/>
             </a:pPr>
-            <a:r>
-              <a:rPr kumimoji="1" lang="ja-JP" altLang="en-US" sz="600"/>
-              <a:t/>
-            </a:r>
-          </a:p>
-          <a:p>
-            <a:r>
-              <a:rPr kumimoji="1" lang="ja-JP" altLang="en-US" sz="600"/>
-              <a:t/>
-            </a:r>
+            <a:endParaRPr kumimoji="1" lang="en-US" altLang="ja-JP" sz="600"/>
+          </a:p>
+          <a:p>
+            <a:endParaRPr kumimoji="1" lang="en-US" altLang="ja-JP" sz="600"/>
           </a:p>
           <a:p>
             <a:pPr marL="246720" indent="-246720">
               <a:buFont typeface="+mj-lt"/>
               <a:buAutoNum type="arabicPeriod"/>
             </a:pPr>
-            <a:r>
-              <a:rPr kumimoji="1" lang="en-US" altLang="ja-JP" sz="600"/>
-              <a:t/>
-            </a:r>
             <a:endParaRPr kumimoji="1" lang="ja-JP" altLang="en-US" sz="600"/>
           </a:p>
         </p:txBody>
@@ -22093,7 +20486,7 @@
           <p:cNvPr id="8" name="object 8">
             <a:extLst>
               <a:ext uri="{FF2B5EF4-FFF2-40B4-BE49-F238E27FC236}">
-                <ns2:creationId id="{532C778C-1A54-5B4D-BF81-752AD85837B3}"/>
+                <a16:creationId xmlns:a16="http://schemas.microsoft.com/office/drawing/2014/main" id="{532C778C-1A54-5B4D-BF81-752AD85837B3}"/>
               </a:ext>
             </a:extLst>
           </p:cNvPr>
@@ -22102,8 +20495,8 @@
         </p:nvSpPr>
         <p:spPr>
           <a:xfrm>
-            <a:off x="5555990" y="1700387"/>
-            <a:ext cx="4779773" cy="45719"/>
+            <a:off x="6619239" y="1700387"/>
+            <a:ext cx="3591114" cy="45719"/>
           </a:xfrm>
           <a:custGeom>
             <a:avLst/>
@@ -22145,69 +20538,738 @@
       </p:sp>
       <p:sp>
         <p:nvSpPr>
-          <p:cNvPr id="9" name="正方形/長方形 8">
-            <a:extLst>
-              <a:ext uri="{FF2B5EF4-FFF2-40B4-BE49-F238E27FC236}">
-                <ns2:creationId id="{05B21B84-6D99-A5C3-EF7F-2A48D186AF43}"/>
-              </a:ext>
-            </a:extLst>
-          </p:cNvPr>
-          <p:cNvSpPr/>
+          <p:cNvPr id="73" name="SECTION_LEFT_TITLE"/>
+          <p:cNvSpPr txBox="1"/>
           <p:nvPr/>
         </p:nvSpPr>
         <p:spPr>
           <a:xfrm>
-            <a:off x="5554212" y="1756847"/>
-            <a:ext cx="4781551" cy="5155943"/>
-          </a:xfrm>
-          <a:prstGeom prst="rect">
-            <a:avLst/>
-          </a:prstGeom>
-          <a:solidFill>
-            <a:schemeClr val="accent2">
-              <a:lumMod val="20000"/>
-              <a:lumOff val="80000"/>
-            </a:schemeClr>
-          </a:solidFill>
-          <a:ln>
+            <a:off x="374904" y="1417320"/>
+            <a:ext cx="6217920" cy="184666"/>
+          </a:xfrm>
+          <a:prstGeom prst="rect">
+            <a:avLst/>
+          </a:prstGeom>
+          <a:noFill/>
+        </p:spPr>
+        <p:txBody>
+          <a:bodyPr wrap="square" lIns="0" tIns="0" rIns="0" bIns="0" anchor="t">
+            <a:spAutoFit/>
+          </a:bodyPr>
+          <a:lstStyle/>
+          <a:p>
+            <a:pPr algn="l"/>
+            <a:r>
+              <a:rPr lang="ja-JP" sz="1200" b="1">
+                <a:latin typeface="Yu Gothic UI"/>
+                <a:ea typeface="Yu Gothic UI"/>
+              </a:rPr>
+              <a:t>ポジショニングマップ</a:t>
+            </a:r>
+          </a:p>
+        </p:txBody>
+      </p:sp>
+      <p:grpSp>
+        <p:nvGrpSpPr>
+          <p:cNvPr id="2" name="グループ化 1">
+            <a:extLst>
+              <a:ext uri="{FF2B5EF4-FFF2-40B4-BE49-F238E27FC236}">
+                <a16:creationId xmlns:a16="http://schemas.microsoft.com/office/drawing/2014/main" id="{95458055-0BD9-DDD6-FA15-B42807D98B16}"/>
+              </a:ext>
+            </a:extLst>
+          </p:cNvPr>
+          <p:cNvGrpSpPr/>
+          <p:nvPr/>
+        </p:nvGrpSpPr>
+        <p:grpSpPr>
+          <a:xfrm>
+            <a:off x="557784" y="2057400"/>
+            <a:ext cx="5852160" cy="4590288"/>
+            <a:chOff x="557784" y="2057400"/>
+            <a:chExt cx="5852160" cy="4590288"/>
+          </a:xfrm>
+        </p:grpSpPr>
+        <p:sp>
+          <p:nvSpPr>
+            <p:cNvPr id="74" name="MAP_FRAME"/>
+            <p:cNvSpPr/>
+            <p:nvPr/>
+          </p:nvSpPr>
+          <p:spPr>
+            <a:xfrm>
+              <a:off x="1060704" y="2057400"/>
+              <a:ext cx="5349240" cy="4069080"/>
+            </a:xfrm>
+            <a:prstGeom prst="rect">
+              <a:avLst/>
+            </a:prstGeom>
             <a:solidFill>
-              <a:schemeClr val="accent2"/>
+              <a:srgbClr val="FAFAFA"/>
             </a:solidFill>
-          </a:ln>
-        </p:spPr>
-        <p:style>
-          <a:lnRef idx="2">
-            <a:schemeClr val="accent1">
-              <a:shade val="50000"/>
-            </a:schemeClr>
-          </a:lnRef>
-          <a:fillRef idx="1">
-            <a:schemeClr val="accent1"/>
-          </a:fillRef>
-          <a:effectRef idx="0">
-            <a:schemeClr val="accent1"/>
-          </a:effectRef>
-          <a:fontRef idx="minor">
-            <a:schemeClr val="lt1"/>
-          </a:fontRef>
-        </p:style>
-        <p:txBody>
-          <a:bodyPr rtlCol="0" anchor="ctr"/>
+            <a:ln w="12700">
+              <a:solidFill>
+                <a:srgbClr val="241A17"/>
+              </a:solidFill>
+            </a:ln>
+            <a:effectLst/>
+          </p:spPr>
+          <p:style>
+            <a:lnRef idx="1">
+              <a:schemeClr val="accent1"/>
+            </a:lnRef>
+            <a:fillRef idx="3">
+              <a:schemeClr val="accent1"/>
+            </a:fillRef>
+            <a:effectRef idx="2">
+              <a:schemeClr val="accent1"/>
+            </a:effectRef>
+            <a:fontRef idx="minor">
+              <a:schemeClr val="lt1"/>
+            </a:fontRef>
+          </p:style>
+          <p:txBody>
+            <a:bodyPr rtlCol="0" anchor="ctr"/>
+            <a:lstStyle/>
+            <a:p>
+              <a:endParaRPr/>
+            </a:p>
+          </p:txBody>
+        </p:sp>
+        <p:cxnSp>
+          <p:nvCxnSpPr>
+            <p:cNvPr id="75" name="MAP_GUIDE_V"/>
+            <p:cNvCxnSpPr/>
+            <p:nvPr/>
+          </p:nvCxnSpPr>
+          <p:spPr>
+            <a:xfrm>
+              <a:off x="3735324" y="2057400"/>
+              <a:ext cx="0" cy="4069080"/>
+            </a:xfrm>
+            <a:prstGeom prst="line">
+              <a:avLst/>
+            </a:prstGeom>
+            <a:ln w="9525">
+              <a:solidFill>
+                <a:srgbClr val="C0C0C0"/>
+              </a:solidFill>
+              <a:prstDash val="dash"/>
+            </a:ln>
+          </p:spPr>
+          <p:style>
+            <a:lnRef idx="2">
+              <a:schemeClr val="accent1"/>
+            </a:lnRef>
+            <a:fillRef idx="0">
+              <a:schemeClr val="accent1"/>
+            </a:fillRef>
+            <a:effectRef idx="1">
+              <a:schemeClr val="accent1"/>
+            </a:effectRef>
+            <a:fontRef idx="minor">
+              <a:schemeClr val="tx1"/>
+            </a:fontRef>
+          </p:style>
+        </p:cxnSp>
+        <p:cxnSp>
+          <p:nvCxnSpPr>
+            <p:cNvPr id="76" name="MAP_GUIDE_H"/>
+            <p:cNvCxnSpPr/>
+            <p:nvPr/>
+          </p:nvCxnSpPr>
+          <p:spPr>
+            <a:xfrm>
+              <a:off x="1060704" y="4091939"/>
+              <a:ext cx="5349240" cy="0"/>
+            </a:xfrm>
+            <a:prstGeom prst="line">
+              <a:avLst/>
+            </a:prstGeom>
+            <a:ln w="9525">
+              <a:solidFill>
+                <a:srgbClr val="C0C0C0"/>
+              </a:solidFill>
+              <a:prstDash val="dash"/>
+            </a:ln>
+          </p:spPr>
+          <p:style>
+            <a:lnRef idx="2">
+              <a:schemeClr val="accent1"/>
+            </a:lnRef>
+            <a:fillRef idx="0">
+              <a:schemeClr val="accent1"/>
+            </a:fillRef>
+            <a:effectRef idx="1">
+              <a:schemeClr val="accent1"/>
+            </a:effectRef>
+            <a:fontRef idx="minor">
+              <a:schemeClr val="tx1"/>
+            </a:fontRef>
+          </p:style>
+        </p:cxnSp>
+        <p:sp>
+          <p:nvSpPr>
+            <p:cNvPr id="77" name="AXIS_X_LABEL"/>
+            <p:cNvSpPr txBox="1"/>
+            <p:nvPr/>
+          </p:nvSpPr>
+          <p:spPr>
+            <a:xfrm>
+              <a:off x="1060704" y="6419088"/>
+              <a:ext cx="5349240" cy="228600"/>
+            </a:xfrm>
+            <a:prstGeom prst="rect">
+              <a:avLst/>
+            </a:prstGeom>
+            <a:noFill/>
+          </p:spPr>
+          <p:txBody>
+            <a:bodyPr wrap="square" lIns="0" tIns="0" rIns="0" bIns="0" anchor="t">
+              <a:spAutoFit/>
+            </a:bodyPr>
+            <a:lstStyle/>
+            <a:p>
+              <a:pPr algn="ctr"/>
+              <a:r>
+                <a:rPr lang="ja-JP" sz="1400" b="1">
+                  <a:latin typeface="Yu Gothic UI"/>
+                  <a:ea typeface="Yu Gothic UI"/>
+                </a:rPr>
+                <a:t>（X軸ラベル）</a:t>
+              </a:r>
+            </a:p>
+          </p:txBody>
+        </p:sp>
+        <p:sp>
+          <p:nvSpPr>
+            <p:cNvPr id="78" name="AXIS_X_LOW"/>
+            <p:cNvSpPr txBox="1"/>
+            <p:nvPr/>
+          </p:nvSpPr>
+          <p:spPr>
+            <a:xfrm>
+              <a:off x="1060704" y="6172200"/>
+              <a:ext cx="1645920" cy="201168"/>
+            </a:xfrm>
+            <a:prstGeom prst="rect">
+              <a:avLst/>
+            </a:prstGeom>
+            <a:noFill/>
+          </p:spPr>
+          <p:txBody>
+            <a:bodyPr wrap="square" lIns="0" tIns="0" rIns="0" bIns="0" anchor="t">
+              <a:spAutoFit/>
+            </a:bodyPr>
+            <a:lstStyle/>
+            <a:p>
+              <a:pPr algn="l"/>
+              <a:r>
+                <a:rPr lang="ja-JP" sz="1000">
+                  <a:latin typeface="Yu Gothic UI"/>
+                  <a:ea typeface="Yu Gothic UI"/>
+                </a:rPr>
+                <a:t>← 低</a:t>
+              </a:r>
+            </a:p>
+          </p:txBody>
+        </p:sp>
+        <p:sp>
+          <p:nvSpPr>
+            <p:cNvPr id="79" name="AXIS_X_HIGH"/>
+            <p:cNvSpPr txBox="1"/>
+            <p:nvPr/>
+          </p:nvSpPr>
+          <p:spPr>
+            <a:xfrm>
+              <a:off x="4764024" y="6172200"/>
+              <a:ext cx="1645920" cy="201168"/>
+            </a:xfrm>
+            <a:prstGeom prst="rect">
+              <a:avLst/>
+            </a:prstGeom>
+            <a:noFill/>
+          </p:spPr>
+          <p:txBody>
+            <a:bodyPr wrap="square" lIns="0" tIns="0" rIns="0" bIns="0" anchor="t">
+              <a:spAutoFit/>
+            </a:bodyPr>
+            <a:lstStyle/>
+            <a:p>
+              <a:pPr algn="r"/>
+              <a:r>
+                <a:rPr lang="ja-JP" sz="1000">
+                  <a:latin typeface="Yu Gothic UI"/>
+                  <a:ea typeface="Yu Gothic UI"/>
+                </a:rPr>
+                <a:t>高 →</a:t>
+              </a:r>
+            </a:p>
+          </p:txBody>
+        </p:sp>
+        <p:sp>
+          <p:nvSpPr>
+            <p:cNvPr id="80" name="AXIS_Y_LABEL"/>
+            <p:cNvSpPr txBox="1"/>
+            <p:nvPr/>
+          </p:nvSpPr>
+          <p:spPr>
+            <a:xfrm rot="16200000">
+              <a:off x="-219456" y="3951257"/>
+              <a:ext cx="1828800" cy="274320"/>
+            </a:xfrm>
+            <a:prstGeom prst="rect">
+              <a:avLst/>
+            </a:prstGeom>
+            <a:noFill/>
+          </p:spPr>
+          <p:txBody>
+            <a:bodyPr wrap="square" lIns="0" tIns="0" rIns="0" bIns="0" anchor="ctr">
+              <a:spAutoFit/>
+            </a:bodyPr>
+            <a:lstStyle/>
+            <a:p>
+              <a:pPr algn="ctr"/>
+              <a:r>
+                <a:rPr lang="ja-JP" sz="1400" b="1">
+                  <a:latin typeface="Yu Gothic UI"/>
+                  <a:ea typeface="Yu Gothic UI"/>
+                </a:rPr>
+                <a:t>（Y軸ラベル）</a:t>
+              </a:r>
+            </a:p>
+          </p:txBody>
+        </p:sp>
+        <p:sp>
+          <p:nvSpPr>
+            <p:cNvPr id="81" name="AXIS_Y_HIGH"/>
+            <p:cNvSpPr txBox="1"/>
+            <p:nvPr/>
+          </p:nvSpPr>
+          <p:spPr>
+            <a:xfrm rot="16200000">
+              <a:off x="332703" y="2529096"/>
+              <a:ext cx="1097280" cy="153888"/>
+            </a:xfrm>
+            <a:prstGeom prst="rect">
+              <a:avLst/>
+            </a:prstGeom>
+            <a:noFill/>
+          </p:spPr>
+          <p:txBody>
+            <a:bodyPr wrap="square" lIns="0" tIns="0" rIns="0" bIns="0" anchor="ctr">
+              <a:spAutoFit/>
+            </a:bodyPr>
+            <a:lstStyle/>
+            <a:p>
+              <a:pPr algn="r"/>
+              <a:r>
+                <a:rPr lang="ja-JP" sz="1000">
+                  <a:latin typeface="Yu Gothic UI"/>
+                  <a:ea typeface="Yu Gothic UI"/>
+                </a:rPr>
+                <a:t>高 →</a:t>
+              </a:r>
+            </a:p>
+          </p:txBody>
+        </p:sp>
+        <p:sp>
+          <p:nvSpPr>
+            <p:cNvPr id="82" name="AXIS_Y_LOW"/>
+            <p:cNvSpPr txBox="1"/>
+            <p:nvPr/>
+          </p:nvSpPr>
+          <p:spPr>
+            <a:xfrm rot="16200000">
+              <a:off x="332703" y="5500896"/>
+              <a:ext cx="1097280" cy="153888"/>
+            </a:xfrm>
+            <a:prstGeom prst="rect">
+              <a:avLst/>
+            </a:prstGeom>
+            <a:noFill/>
+          </p:spPr>
+          <p:txBody>
+            <a:bodyPr wrap="square" lIns="0" tIns="0" rIns="0" bIns="0" anchor="ctr">
+              <a:spAutoFit/>
+            </a:bodyPr>
+            <a:lstStyle/>
+            <a:p>
+              <a:pPr algn="l"/>
+              <a:r>
+                <a:rPr lang="ja-JP" sz="1000">
+                  <a:latin typeface="Yu Gothic UI"/>
+                  <a:ea typeface="Yu Gothic UI"/>
+                </a:rPr>
+                <a:t>← 低</a:t>
+              </a:r>
+            </a:p>
+          </p:txBody>
+        </p:sp>
+        <p:sp>
+          <p:nvSpPr>
+            <p:cNvPr id="83" name="QUAD_TL"/>
+            <p:cNvSpPr txBox="1"/>
+            <p:nvPr/>
+          </p:nvSpPr>
+          <p:spPr>
+            <a:xfrm>
+              <a:off x="1170431" y="2150479"/>
+              <a:ext cx="2011680" cy="228600"/>
+            </a:xfrm>
+            <a:prstGeom prst="rect">
+              <a:avLst/>
+            </a:prstGeom>
+            <a:noFill/>
+          </p:spPr>
+          <p:txBody>
+            <a:bodyPr wrap="square" lIns="0" tIns="0" rIns="0" bIns="0" anchor="t">
+              <a:spAutoFit/>
+            </a:bodyPr>
+            <a:lstStyle/>
+            <a:p>
+              <a:pPr algn="l"/>
+              <a:r>
+                <a:rPr lang="ja-JP" sz="1200" i="1">
+                  <a:latin typeface="Yu Gothic UI"/>
+                  <a:ea typeface="Yu Gothic UI"/>
+                </a:rPr>
+                <a:t>（左上象限）</a:t>
+              </a:r>
+            </a:p>
+          </p:txBody>
+        </p:sp>
+        <p:sp>
+          <p:nvSpPr>
+            <p:cNvPr id="84" name="QUAD_TR"/>
+            <p:cNvSpPr txBox="1"/>
+            <p:nvPr/>
+          </p:nvSpPr>
+          <p:spPr>
+            <a:xfrm>
+              <a:off x="4288536" y="2150479"/>
+              <a:ext cx="2011680" cy="228600"/>
+            </a:xfrm>
+            <a:prstGeom prst="rect">
+              <a:avLst/>
+            </a:prstGeom>
+            <a:noFill/>
+          </p:spPr>
+          <p:txBody>
+            <a:bodyPr wrap="square" lIns="0" tIns="0" rIns="0" bIns="0" anchor="t">
+              <a:spAutoFit/>
+            </a:bodyPr>
+            <a:lstStyle/>
+            <a:p>
+              <a:pPr algn="r"/>
+              <a:r>
+                <a:rPr lang="ja-JP" sz="1200" i="1">
+                  <a:latin typeface="Yu Gothic UI"/>
+                  <a:ea typeface="Yu Gothic UI"/>
+                </a:rPr>
+                <a:t>（右上象限）</a:t>
+              </a:r>
+            </a:p>
+          </p:txBody>
+        </p:sp>
+        <p:sp>
+          <p:nvSpPr>
+            <p:cNvPr id="85" name="QUAD_BL"/>
+            <p:cNvSpPr txBox="1"/>
+            <p:nvPr/>
+          </p:nvSpPr>
+          <p:spPr>
+            <a:xfrm>
+              <a:off x="1170431" y="5824728"/>
+              <a:ext cx="2011680" cy="228600"/>
+            </a:xfrm>
+            <a:prstGeom prst="rect">
+              <a:avLst/>
+            </a:prstGeom>
+            <a:noFill/>
+          </p:spPr>
+          <p:txBody>
+            <a:bodyPr wrap="square" lIns="0" tIns="0" rIns="0" bIns="0" anchor="t">
+              <a:spAutoFit/>
+            </a:bodyPr>
+            <a:lstStyle/>
+            <a:p>
+              <a:pPr algn="l"/>
+              <a:r>
+                <a:rPr lang="ja-JP" sz="1200" i="1">
+                  <a:latin typeface="Yu Gothic UI"/>
+                  <a:ea typeface="Yu Gothic UI"/>
+                </a:rPr>
+                <a:t>（左下象限）</a:t>
+              </a:r>
+            </a:p>
+          </p:txBody>
+        </p:sp>
+        <p:sp>
+          <p:nvSpPr>
+            <p:cNvPr id="86" name="QUAD_BR"/>
+            <p:cNvSpPr txBox="1"/>
+            <p:nvPr/>
+          </p:nvSpPr>
+          <p:spPr>
+            <a:xfrm>
+              <a:off x="4288536" y="5824728"/>
+              <a:ext cx="2011680" cy="228600"/>
+            </a:xfrm>
+            <a:prstGeom prst="rect">
+              <a:avLst/>
+            </a:prstGeom>
+            <a:noFill/>
+          </p:spPr>
+          <p:txBody>
+            <a:bodyPr wrap="square" lIns="0" tIns="0" rIns="0" bIns="0" anchor="t">
+              <a:spAutoFit/>
+            </a:bodyPr>
+            <a:lstStyle/>
+            <a:p>
+              <a:pPr algn="r"/>
+              <a:r>
+                <a:rPr lang="ja-JP" sz="1200" i="1">
+                  <a:latin typeface="Yu Gothic UI"/>
+                  <a:ea typeface="Yu Gothic UI"/>
+                </a:rPr>
+                <a:t>（右下象限）</a:t>
+              </a:r>
+            </a:p>
+          </p:txBody>
+        </p:sp>
+      </p:grpSp>
+      <p:sp>
+        <p:nvSpPr>
+          <p:cNvPr id="87" name="IMPL_TITLE"/>
+          <p:cNvSpPr txBox="1"/>
+          <p:nvPr/>
+        </p:nvSpPr>
+        <p:spPr>
+          <a:xfrm>
+            <a:off x="6684264" y="1417320"/>
+            <a:ext cx="3639312" cy="184666"/>
+          </a:xfrm>
+          <a:prstGeom prst="rect">
+            <a:avLst/>
+          </a:prstGeom>
+          <a:noFill/>
+        </p:spPr>
+        <p:txBody>
+          <a:bodyPr wrap="square" lIns="0" tIns="0" rIns="0" bIns="0" anchor="t">
+            <a:spAutoFit/>
+          </a:bodyPr>
           <a:lstStyle/>
           <a:p>
             <a:pPr algn="l"/>
-            <a:endParaRPr kumimoji="1" lang="en-US" altLang="ja-JP" sz="1295">
-              <a:solidFill>
-                <a:schemeClr val="tx1"/>
-              </a:solidFill>
-            </a:endParaRPr>
+            <a:r>
+              <a:rPr lang="ja-JP" sz="1200" b="1">
+                <a:latin typeface="Yu Gothic UI"/>
+                <a:ea typeface="Yu Gothic UI"/>
+              </a:rPr>
+              <a:t>ポジショニングからの示唆</a:t>
+            </a:r>
+          </a:p>
+        </p:txBody>
+      </p:sp>
+      <p:sp>
+        <p:nvSpPr>
+          <p:cNvPr id="88" name="IMPL_1"/>
+          <p:cNvSpPr txBox="1"/>
+          <p:nvPr/>
+        </p:nvSpPr>
+        <p:spPr>
+          <a:xfrm>
+            <a:off x="6729983" y="1874519"/>
+            <a:ext cx="3547872" cy="640080"/>
+          </a:xfrm>
+          <a:prstGeom prst="rect">
+            <a:avLst/>
+          </a:prstGeom>
+          <a:noFill/>
+        </p:spPr>
+        <p:txBody>
+          <a:bodyPr wrap="square" lIns="0" tIns="0" rIns="0" bIns="0" anchor="t">
+            <a:spAutoFit/>
+          </a:bodyPr>
+          <a:lstStyle/>
+          <a:p>
+            <a:pPr marL="220000" indent="-220000" algn="l">
+              <a:buClr>
+                <a:srgbClr val="7C4C2C"/>
+              </a:buClr>
+              <a:buFont typeface="Arial"/>
+              <a:buChar char="●"/>
+            </a:pPr>
+            <a:r>
+              <a:rPr lang="ja-JP" sz="1000">
+                <a:latin typeface="Yu Gothic UI"/>
+                <a:ea typeface="Yu Gothic UI"/>
+              </a:rPr>
+              <a:t>（示唆 1）</a:t>
+            </a:r>
+          </a:p>
+        </p:txBody>
+      </p:sp>
+      <p:sp>
+        <p:nvSpPr>
+          <p:cNvPr id="89" name="IMPL_2"/>
+          <p:cNvSpPr txBox="1"/>
+          <p:nvPr/>
+        </p:nvSpPr>
+        <p:spPr>
+          <a:xfrm>
+            <a:off x="6729983" y="2514600"/>
+            <a:ext cx="3547872" cy="640080"/>
+          </a:xfrm>
+          <a:prstGeom prst="rect">
+            <a:avLst/>
+          </a:prstGeom>
+          <a:noFill/>
+        </p:spPr>
+        <p:txBody>
+          <a:bodyPr wrap="square" lIns="0" tIns="0" rIns="0" bIns="0" anchor="t">
+            <a:spAutoFit/>
+          </a:bodyPr>
+          <a:lstStyle/>
+          <a:p>
+            <a:pPr marL="220000" indent="-220000" algn="l">
+              <a:buClr>
+                <a:srgbClr val="7C4C2C"/>
+              </a:buClr>
+              <a:buFont typeface="Arial"/>
+              <a:buChar char="●"/>
+            </a:pPr>
+            <a:r>
+              <a:rPr lang="ja-JP" sz="1000">
+                <a:latin typeface="Yu Gothic UI"/>
+                <a:ea typeface="Yu Gothic UI"/>
+              </a:rPr>
+              <a:t>（示唆 2）</a:t>
+            </a:r>
+          </a:p>
+        </p:txBody>
+      </p:sp>
+      <p:sp>
+        <p:nvSpPr>
+          <p:cNvPr id="90" name="IMPL_3"/>
+          <p:cNvSpPr txBox="1"/>
+          <p:nvPr/>
+        </p:nvSpPr>
+        <p:spPr>
+          <a:xfrm>
+            <a:off x="6729983" y="3154679"/>
+            <a:ext cx="3547872" cy="640080"/>
+          </a:xfrm>
+          <a:prstGeom prst="rect">
+            <a:avLst/>
+          </a:prstGeom>
+          <a:noFill/>
+        </p:spPr>
+        <p:txBody>
+          <a:bodyPr wrap="square" lIns="0" tIns="0" rIns="0" bIns="0" anchor="t">
+            <a:spAutoFit/>
+          </a:bodyPr>
+          <a:lstStyle/>
+          <a:p>
+            <a:pPr marL="220000" indent="-220000" algn="l">
+              <a:buClr>
+                <a:srgbClr val="7C4C2C"/>
+              </a:buClr>
+              <a:buFont typeface="Arial"/>
+              <a:buChar char="●"/>
+            </a:pPr>
+            <a:r>
+              <a:rPr lang="ja-JP" sz="1000">
+                <a:latin typeface="Yu Gothic UI"/>
+                <a:ea typeface="Yu Gothic UI"/>
+              </a:rPr>
+              <a:t>（示唆 3）</a:t>
+            </a:r>
+          </a:p>
+        </p:txBody>
+      </p:sp>
+      <p:sp>
+        <p:nvSpPr>
+          <p:cNvPr id="91" name="IMPL_4"/>
+          <p:cNvSpPr txBox="1"/>
+          <p:nvPr/>
+        </p:nvSpPr>
+        <p:spPr>
+          <a:xfrm>
+            <a:off x="6729983" y="3794759"/>
+            <a:ext cx="3547872" cy="640080"/>
+          </a:xfrm>
+          <a:prstGeom prst="rect">
+            <a:avLst/>
+          </a:prstGeom>
+          <a:noFill/>
+        </p:spPr>
+        <p:txBody>
+          <a:bodyPr wrap="square" lIns="0" tIns="0" rIns="0" bIns="0" anchor="t">
+            <a:spAutoFit/>
+          </a:bodyPr>
+          <a:lstStyle/>
+          <a:p>
+            <a:pPr marL="220000" indent="-220000" algn="l">
+              <a:buClr>
+                <a:srgbClr val="7C4C2C"/>
+              </a:buClr>
+              <a:buFont typeface="Arial"/>
+              <a:buChar char="●"/>
+            </a:pPr>
+            <a:r>
+              <a:rPr lang="ja-JP" sz="1000">
+                <a:latin typeface="Yu Gothic UI"/>
+                <a:ea typeface="Yu Gothic UI"/>
+              </a:rPr>
+              <a:t>（示唆 4）</a:t>
+            </a:r>
+          </a:p>
+        </p:txBody>
+      </p:sp>
+      <p:sp>
+        <p:nvSpPr>
+          <p:cNvPr id="92" name="IMPL_5"/>
+          <p:cNvSpPr txBox="1"/>
+          <p:nvPr/>
+        </p:nvSpPr>
+        <p:spPr>
+          <a:xfrm>
+            <a:off x="6729983" y="4434840"/>
+            <a:ext cx="3547872" cy="640080"/>
+          </a:xfrm>
+          <a:prstGeom prst="rect">
+            <a:avLst/>
+          </a:prstGeom>
+          <a:noFill/>
+        </p:spPr>
+        <p:txBody>
+          <a:bodyPr wrap="square" lIns="0" tIns="0" rIns="0" bIns="0" anchor="t">
+            <a:spAutoFit/>
+          </a:bodyPr>
+          <a:lstStyle/>
+          <a:p>
+            <a:pPr marL="220000" indent="-220000" algn="l">
+              <a:buClr>
+                <a:srgbClr val="7C4C2C"/>
+              </a:buClr>
+              <a:buFont typeface="Arial"/>
+              <a:buChar char="●"/>
+            </a:pPr>
+            <a:r>
+              <a:rPr lang="ja-JP" sz="1000">
+                <a:latin typeface="Yu Gothic UI"/>
+                <a:ea typeface="Yu Gothic UI"/>
+              </a:rPr>
+              <a:t>（示唆 5）</a:t>
+            </a:r>
           </a:p>
         </p:txBody>
       </p:sp>
     </p:spTree>
     <p:extLst>
       <p:ext uri="{BB962C8B-B14F-4D97-AF65-F5344CB8AC3E}">
-        <ns3:creationId val="2149636147"/>
+        <p14:creationId xmlns:p14="http://schemas.microsoft.com/office/powerpoint/2010/main" val="2149636147"/>
       </p:ext>
     </p:extLst>
   </p:cSld>
@@ -23090,17 +22152,6 @@
 </file>
 
 <file path=customXml/item1.xml><?xml version="1.0" encoding="utf-8"?>
-<p:properties xmlns:p="http://schemas.microsoft.com/office/2006/metadata/properties" xmlns:xsi="http://www.w3.org/2001/XMLSchema-instance" xmlns:pc="http://schemas.microsoft.com/office/infopath/2007/PartnerControls">
-  <documentManagement>
-    <lcf76f155ced4ddcb4097134ff3c332f xmlns="ec03855f-4e58-4bd4-8ce9-3e5191a2da57">
-      <Terms xmlns="http://schemas.microsoft.com/office/infopath/2007/PartnerControls"/>
-    </lcf76f155ced4ddcb4097134ff3c332f>
-    <TaxCatchAll xmlns="e1d10421-5d3e-41ae-890f-88fa571bd150" xsi:nil="true"/>
-  </documentManagement>
-</p:properties>
-</file>
-
-<file path=customXml/item2.xml><?xml version="1.0" encoding="utf-8"?>
 <?mso-contentType ?>
 <FormTemplates xmlns="http://schemas.microsoft.com/sharepoint/v3/contenttype/forms">
   <Display>DocumentLibraryForm</Display>
@@ -23109,7 +22160,7 @@
 </FormTemplates>
 </file>
 
-<file path=customXml/item3.xml><?xml version="1.0" encoding="utf-8"?>
+<file path=customXml/item2.xml><?xml version="1.0" encoding="utf-8"?>
 <ct:contentTypeSchema xmlns:ct="http://schemas.microsoft.com/office/2006/metadata/contentType" xmlns:ma="http://schemas.microsoft.com/office/2006/metadata/properties/metaAttributes" ct:_="" ma:_="" ma:contentTypeName="ドキュメント" ma:contentTypeID="0x010100FFF2E54248E46B4DAF6EB6C044AEA5B0" ma:contentTypeVersion="14" ma:contentTypeDescription="新しいドキュメントを作成します。" ma:contentTypeScope="" ma:versionID="01b29ea40b42ed6e5ad7f8eb530f8bb8">
   <xsd:schema xmlns:xsd="http://www.w3.org/2001/XMLSchema" xmlns:xs="http://www.w3.org/2001/XMLSchema" xmlns:p="http://schemas.microsoft.com/office/2006/metadata/properties" xmlns:ns2="ec03855f-4e58-4bd4-8ce9-3e5191a2da57" xmlns:ns3="e1d10421-5d3e-41ae-890f-88fa571bd150" targetNamespace="http://schemas.microsoft.com/office/2006/metadata/properties" ma:root="true" ma:fieldsID="c0232e2fda7e428c6f9dda7c9ee2a892" ns2:_="" ns3:_="">
     <xsd:import namespace="ec03855f-4e58-4bd4-8ce9-3e5191a2da57"/>
@@ -23322,24 +22373,18 @@
 </ct:contentTypeSchema>
 </file>
 
-<file path=customXml/itemProps1.xml><?xml version="1.0" encoding="utf-8"?>
-<ds:datastoreItem xmlns:ds="http://schemas.openxmlformats.org/officeDocument/2006/customXml" ds:itemID="{4EACAEC8-709A-40FA-8B5E-1F8781538527}">
-  <ds:schemaRefs>
-    <ds:schemaRef ds:uri="e1d10421-5d3e-41ae-890f-88fa571bd150"/>
-    <ds:schemaRef ds:uri="ec03855f-4e58-4bd4-8ce9-3e5191a2da57"/>
-    <ds:schemaRef ds:uri="http://purl.org/dc/dcmitype/"/>
-    <ds:schemaRef ds:uri="http://purl.org/dc/elements/1.1/"/>
-    <ds:schemaRef ds:uri="http://purl.org/dc/terms/"/>
-    <ds:schemaRef ds:uri="http://schemas.microsoft.com/office/2006/documentManagement/types"/>
-    <ds:schemaRef ds:uri="http://schemas.microsoft.com/office/2006/metadata/properties"/>
-    <ds:schemaRef ds:uri="http://schemas.microsoft.com/office/infopath/2007/PartnerControls"/>
-    <ds:schemaRef ds:uri="http://schemas.openxmlformats.org/package/2006/metadata/core-properties"/>
-    <ds:schemaRef ds:uri="http://www.w3.org/XML/1998/namespace"/>
-  </ds:schemaRefs>
-</ds:datastoreItem>
+<file path=customXml/item3.xml><?xml version="1.0" encoding="utf-8"?>
+<p:properties xmlns:p="http://schemas.microsoft.com/office/2006/metadata/properties" xmlns:xsi="http://www.w3.org/2001/XMLSchema-instance" xmlns:pc="http://schemas.microsoft.com/office/infopath/2007/PartnerControls">
+  <documentManagement>
+    <lcf76f155ced4ddcb4097134ff3c332f xmlns="ec03855f-4e58-4bd4-8ce9-3e5191a2da57">
+      <Terms xmlns="http://schemas.microsoft.com/office/infopath/2007/PartnerControls"/>
+    </lcf76f155ced4ddcb4097134ff3c332f>
+    <TaxCatchAll xmlns="e1d10421-5d3e-41ae-890f-88fa571bd150" xsi:nil="true"/>
+  </documentManagement>
+</p:properties>
 </file>
 
-<file path=customXml/itemProps2.xml><?xml version="1.0" encoding="utf-8"?>
+<file path=customXml/itemProps1.xml><?xml version="1.0" encoding="utf-8"?>
 <ds:datastoreItem xmlns:ds="http://schemas.openxmlformats.org/officeDocument/2006/customXml" ds:itemID="{79F8B655-F016-4DDD-9774-1583C098AF06}">
   <ds:schemaRefs>
     <ds:schemaRef ds:uri="http://schemas.microsoft.com/sharepoint/v3/contenttype/forms"/>
@@ -23347,7 +22392,7 @@
 </ds:datastoreItem>
 </file>
 
-<file path=customXml/itemProps3.xml><?xml version="1.0" encoding="utf-8"?>
+<file path=customXml/itemProps2.xml><?xml version="1.0" encoding="utf-8"?>
 <ds:datastoreItem xmlns:ds="http://schemas.openxmlformats.org/officeDocument/2006/customXml" ds:itemID="{E6247A19-ACB9-4958-993B-9F92F76C95B5}">
   <ds:schemaRefs>
     <ds:schemaRef ds:uri="e1d10421-5d3e-41ae-890f-88fa571bd150"/>
@@ -23364,4 +22409,21 @@
     <ds:schemaRef ds:uri="http://www.w3.org/2001/XMLSchema"/>
   </ds:schemaRefs>
 </ds:datastoreItem>
+</file>
+
+<file path=customXml/itemProps3.xml><?xml version="1.0" encoding="utf-8"?>
+<ds:datastoreItem xmlns:ds="http://schemas.openxmlformats.org/officeDocument/2006/customXml" ds:itemID="{4EACAEC8-709A-40FA-8B5E-1F8781538527}">
+  <ds:schemaRefs>
+    <ds:schemaRef ds:uri="e1d10421-5d3e-41ae-890f-88fa571bd150"/>
+    <ds:schemaRef ds:uri="ec03855f-4e58-4bd4-8ce9-3e5191a2da57"/>
+    <ds:schemaRef ds:uri="http://purl.org/dc/dcmitype/"/>
+    <ds:schemaRef ds:uri="http://purl.org/dc/elements/1.1/"/>
+    <ds:schemaRef ds:uri="http://purl.org/dc/terms/"/>
+    <ds:schemaRef ds:uri="http://schemas.microsoft.com/office/2006/documentManagement/types"/>
+    <ds:schemaRef ds:uri="http://schemas.microsoft.com/office/2006/metadata/properties"/>
+    <ds:schemaRef ds:uri="http://schemas.microsoft.com/office/infopath/2007/PartnerControls"/>
+    <ds:schemaRef ds:uri="http://schemas.openxmlformats.org/package/2006/metadata/core-properties"/>
+    <ds:schemaRef ds:uri="http://www.w3.org/XML/1998/namespace"/>
+  </ds:schemaRefs>
+</ds:datastoreItem>
 </file>